--- a/figures/fig2_fair_levels/fig2_fair_levels_design.pptx
+++ b/figures/fig2_fair_levels/fig2_fair_levels_design.pptx
@@ -503,47 +503,25 @@
             <a:r>
               <a:rPr lang="en-US" dirty="0"/>
               <a:t>Fig. 2 design draft: levels of FAIRness and the layers that enable them. Steps follow the visual style and layer numbers (1-6) of Fig. 1. Steps are linked to layers by colour and number badge rather than connector lines (TODO F7).
-EXPLICIT MAPPING (check with a FAIR expert, TODO C6). FAIR principles: Wilkinson et al. 2016, Sci Data 3:160018. RDA indicators: RDA FAIR Data Maturity Model v1.0 (doi:10.15497/rda00050); IDs shown in the figure without the 'RDA-' prefix; RDA priority in brackets. Many indicators depend on several layers; Suppl. Table S2 lists all contributions. F2 and R1.2 are met jointly by levels 2-3 (content) and level 5 (exposure).
+FAIR PRINCIPLES PER LEVEL (Wilkinson et al. 2016, Sci Data 3:160018). The mapping to the RDA FAIR Data Maturity Model indicators is in Suppl. Table S2 only.
 LEVEL 0, OPAQUE (NO STANDARD)
 FAIR principles: none
-RDA indicators: none
 LEVEL 1, READABLE (5 DATA FORMATS)
 FAIR principles:
   I1: (Meta)data use a formal, accessible, shared, and broadly applicable language for knowledge representation.
-RDA indicators:
-  RDA-I1-01D: Data uses knowledge representation expressed in standardised format [important]
 LEVEL 2, INTERPRETABLE FILES (3 FILE ORGANIZATION STANDARDS)
 FAIR principles:
   R1: (Meta)data are richly described with a plurality of accurate and relevant attributes.
   R1.3: (Meta)data meet domain-relevant community standards.
-RDA indicators:
-  RDA-R1.3-01D: Data complies with a community standard [essential]
-  RDA-R1.3-02D: Data is expressed in compliance with a machine-understandable community standard [important]
-  RDA-I1-02D: Data uses machine-understandable knowledge representation [important]
 LEVEL 3, ORGANIZED DATASET (2 DATASET ORGANIZATION STANDARDS)
 FAIR principles:
   R1: (Meta)data are richly described with a plurality of accurate and relevant attributes.
   R1.3: (Meta)data meet domain-relevant community standards.
   F2: Data are described with rich metadata (defined by R1).
-RDA indicators:
-  RDA-R1.3-01M: Metadata complies with a community standard [essential]
-  RDA-R1.3-02M: Metadata is expressed in compliance with a machine-understandable community standard [essential]
-  RDA-I1-01M: Metadata uses knowledge representation expressed in standardised format [important]
-  RDA-I1-02M: Metadata uses machine-understandable knowledge representation [important]
-  RDA-R1-01M: Plurality of accurate and relevant attributes are provided to allow reuse [essential]
 LEVEL 4, INTEROPERABLE (4 ONTOLOGIES &amp; TERMINOLOGIES)
 FAIR principles:
   I2: (Meta)data use vocabularies that follow FAIR principles.
   I3: (Meta)data include qualified references to other (meta)data.
-RDA indicators:
-  RDA-I2-01M: Metadata uses FAIR-compliant vocabularies [important]
-  RDA-I2-01D: Data uses FAIR-compliant vocabularies [useful]
-  RDA-I3-01M: Metadata includes references to other metadata [important]
-  RDA-I3-02M: Metadata includes references to other data [useful]
-  RDA-I3-03M: Metadata includes qualified references to other metadata [important]
-  RDA-I3-04M: Metadata include qualified references to other data [useful]
-  RDA-I3-01D: Data includes references to other data [useful]
-  RDA-I3-02D: Data includes qualified references to other data [useful]
 LEVEL 5, FINDABLE AND REUSABLE RECORD (1 DATA ARCHIVES)
 FAIR principles:
   F1: (Meta)data are assigned a globally unique and persistent identifier.
@@ -555,32 +533,7 @@
   A1.2: The protocol allows for an authentication and authorisation procedure, where necessary.
   A2: Metadata are accessible, even when the data are no longer available.
   R1.1: (Meta)data are released with a clear and accessible data usage licence.
-  R1.2: (Meta)data are associated with detailed provenance.
-RDA indicators:
-  RDA-F1-01M: Metadata is identified by a persistent identifier [essential]
-  RDA-F1-01D: Data is identified by a persistent identifier [essential]
-  RDA-F1-02M: Metadata is identified by a globally unique identifier [essential]
-  RDA-F1-02D: Data is identified by a globally unique identifier [essential]
-  RDA-F2-01M: Rich metadata is provided to allow discovery [essential]
-  RDA-F3-01M: Metadata includes the identifier for the data [essential]
-  RDA-F4-01M: Metadata is offered in such a way that it can be harvested and indexed [essential]
-  RDA-A1-01M: Metadata contains information to enable the user to get access to the data [important]
-  RDA-A1-02M: Metadata can be accessed manually (i.e. with human intervention) [essential]
-  RDA-A1-02D: Data can be accessed manually (i.e. with human intervention) [essential]
-  RDA-A1-03M: Metadata identifier resolves to a metadata record [essential]
-  RDA-A1-03D: Data identifier resolves to a digital object [essential]
-  RDA-A1-04M: Metadata is accessed through standardised protocol [essential]
-  RDA-A1-04D: Data is accessible through standardised protocol [essential]
-  RDA-A1-05D: Data can be accessed automatically (i.e. by a computer program) [important]
-  RDA-A1.1-01M: Metadata is accessible through a free access protocol [essential]
-  RDA-A1.1-01D: Data is accessible through a free access protocol [important]
-  RDA-A1.2-01D: Data is accessible through an access protocol that supports authentication and authorisation [useful]
-  RDA-A2-01M: Metadata is guaranteed to remain available after data is no longer available [essential]
-  RDA-R1.1-01M: Metadata includes information about the licence under which the data can be reused [essential]
-  RDA-R1.1-02M: Metadata refers to a standard reuse licence [important]
-  RDA-R1.1-03M: Metadata refers to a machine-understandable reuse licence [important]
-  RDA-R1.2-01M: Metadata includes provenance information according to community-specific standards [important]
-  RDA-R1.2-02M: Metadata includes provenance information according to a cross-domain language [useful]</a:t>
+  R1.2: (Meta)data are associated with detailed provenance.</a:t>
             </a:r>
             <a:endParaRPr lang="en-US" dirty="0"/>
           </a:p>
@@ -1091,8 +1044,8 @@
         </p:nvSpPr>
         <p:spPr>
           <a:xfrm>
-            <a:off x="475488" y="4462272"/>
-            <a:ext cx="1764792" cy="1133856"/>
+            <a:off x="475488" y="4754880"/>
+            <a:ext cx="1764792" cy="841248"/>
           </a:xfrm>
           <a:prstGeom prst="rect">
             <a:avLst/>
@@ -1151,37 +1104,6 @@
                 <a:cs typeface="Arial" pitchFamily="34" charset="-120"/>
               </a:rPr>
               <a:t>FAIR: </a:t>
-            </a:r>
-            <a:pPr indent="0" marL="0">
-              <a:buNone/>
-            </a:pPr>
-            <a:r>
-              <a:rPr lang="en-US" sz="900" dirty="0">
-                <a:solidFill>
-                  <a:srgbClr val="1F2933"/>
-                </a:solidFill>
-                <a:latin typeface="Arial" pitchFamily="34" charset="0"/>
-                <a:ea typeface="Arial" pitchFamily="34" charset="-122"/>
-                <a:cs typeface="Arial" pitchFamily="34" charset="-120"/>
-              </a:rPr>
-              <a:t>none</a:t>
-            </a:r>
-            <a:endParaRPr lang="en-US" sz="950" dirty="0"/>
-          </a:p>
-          <a:p>
-            <a:pPr indent="0" marL="0">
-              <a:buNone/>
-            </a:pPr>
-            <a:r>
-              <a:rPr lang="en-US" sz="900" dirty="0">
-                <a:solidFill>
-                  <a:srgbClr val="5B6770"/>
-                </a:solidFill>
-                <a:latin typeface="Arial" pitchFamily="34" charset="0"/>
-                <a:ea typeface="Arial" pitchFamily="34" charset="-122"/>
-                <a:cs typeface="Arial" pitchFamily="34" charset="-120"/>
-              </a:rPr>
-              <a:t>RDA: </a:t>
             </a:r>
             <a:pPr indent="0" marL="0">
               <a:buNone/>
@@ -1403,8 +1325,8 @@
         </p:nvSpPr>
         <p:spPr>
           <a:xfrm>
-            <a:off x="2368296" y="3749040"/>
-            <a:ext cx="1764792" cy="1133856"/>
+            <a:off x="2368296" y="4041648"/>
+            <a:ext cx="1764792" cy="841248"/>
           </a:xfrm>
           <a:prstGeom prst="rect">
             <a:avLst/>
@@ -1477,37 +1399,6 @@
                 <a:cs typeface="Arial" pitchFamily="34" charset="-120"/>
               </a:rPr>
               <a:t>I1</a:t>
-            </a:r>
-            <a:endParaRPr lang="en-US" sz="950" dirty="0"/>
-          </a:p>
-          <a:p>
-            <a:pPr indent="0" marL="0">
-              <a:buNone/>
-            </a:pPr>
-            <a:r>
-              <a:rPr lang="en-US" sz="900" dirty="0">
-                <a:solidFill>
-                  <a:srgbClr val="5B6770"/>
-                </a:solidFill>
-                <a:latin typeface="Arial" pitchFamily="34" charset="0"/>
-                <a:ea typeface="Arial" pitchFamily="34" charset="-122"/>
-                <a:cs typeface="Arial" pitchFamily="34" charset="-120"/>
-              </a:rPr>
-              <a:t>RDA: </a:t>
-            </a:r>
-            <a:pPr indent="0" marL="0">
-              <a:buNone/>
-            </a:pPr>
-            <a:r>
-              <a:rPr lang="en-US" sz="900" dirty="0">
-                <a:solidFill>
-                  <a:srgbClr val="1F2933"/>
-                </a:solidFill>
-                <a:latin typeface="Arial" pitchFamily="34" charset="0"/>
-                <a:ea typeface="Arial" pitchFamily="34" charset="-122"/>
-                <a:cs typeface="Arial" pitchFamily="34" charset="-120"/>
-              </a:rPr>
-              <a:t>I1-01D</a:t>
             </a:r>
             <a:endParaRPr lang="en-US" sz="950" dirty="0"/>
           </a:p>
@@ -1715,8 +1606,8 @@
         </p:nvSpPr>
         <p:spPr>
           <a:xfrm>
-            <a:off x="4261104" y="3035808"/>
-            <a:ext cx="1764792" cy="1133856"/>
+            <a:off x="4261104" y="3328416"/>
+            <a:ext cx="1764792" cy="841248"/>
           </a:xfrm>
           <a:prstGeom prst="rect">
             <a:avLst/>
@@ -1789,54 +1680,6 @@
                 <a:cs typeface="Arial" pitchFamily="34" charset="-120"/>
               </a:rPr>
               <a:t>R1, R1.3</a:t>
-            </a:r>
-            <a:endParaRPr lang="en-US" sz="950" dirty="0"/>
-          </a:p>
-          <a:p>
-            <a:pPr indent="0" marL="0">
-              <a:buNone/>
-            </a:pPr>
-            <a:r>
-              <a:rPr lang="en-US" sz="900" dirty="0">
-                <a:solidFill>
-                  <a:srgbClr val="5B6770"/>
-                </a:solidFill>
-                <a:latin typeface="Arial" pitchFamily="34" charset="0"/>
-                <a:ea typeface="Arial" pitchFamily="34" charset="-122"/>
-                <a:cs typeface="Arial" pitchFamily="34" charset="-120"/>
-              </a:rPr>
-              <a:t>RDA: </a:t>
-            </a:r>
-            <a:pPr indent="0" marL="0">
-              <a:buNone/>
-            </a:pPr>
-            <a:r>
-              <a:rPr lang="en-US" sz="900" dirty="0">
-                <a:solidFill>
-                  <a:srgbClr val="1F2933"/>
-                </a:solidFill>
-                <a:latin typeface="Arial" pitchFamily="34" charset="0"/>
-                <a:ea typeface="Arial" pitchFamily="34" charset="-122"/>
-                <a:cs typeface="Arial" pitchFamily="34" charset="-120"/>
-              </a:rPr>
-              <a:t>R1.3-01D, R1.3-02D,</a:t>
-            </a:r>
-            <a:endParaRPr lang="en-US" sz="950" dirty="0"/>
-          </a:p>
-          <a:p>
-            <a:pPr indent="0" marL="0">
-              <a:buNone/>
-            </a:pPr>
-            <a:r>
-              <a:rPr lang="en-US" sz="900" dirty="0">
-                <a:solidFill>
-                  <a:srgbClr val="1F2933"/>
-                </a:solidFill>
-                <a:latin typeface="Arial" pitchFamily="34" charset="0"/>
-                <a:ea typeface="Arial" pitchFamily="34" charset="-122"/>
-                <a:cs typeface="Arial" pitchFamily="34" charset="-120"/>
-              </a:rPr>
-              <a:t>I1-02D</a:t>
             </a:r>
             <a:endParaRPr lang="en-US" sz="950" dirty="0"/>
           </a:p>
@@ -2044,8 +1887,8 @@
         </p:nvSpPr>
         <p:spPr>
           <a:xfrm>
-            <a:off x="6153912" y="2322576"/>
-            <a:ext cx="1764792" cy="1133856"/>
+            <a:off x="6153912" y="2615184"/>
+            <a:ext cx="1764792" cy="841248"/>
           </a:xfrm>
           <a:prstGeom prst="rect">
             <a:avLst/>
@@ -2118,54 +1961,6 @@
                 <a:cs typeface="Arial" pitchFamily="34" charset="-120"/>
               </a:rPr>
               <a:t>R1, R1.3, F2</a:t>
-            </a:r>
-            <a:endParaRPr lang="en-US" sz="950" dirty="0"/>
-          </a:p>
-          <a:p>
-            <a:pPr indent="0" marL="0">
-              <a:buNone/>
-            </a:pPr>
-            <a:r>
-              <a:rPr lang="en-US" sz="900" dirty="0">
-                <a:solidFill>
-                  <a:srgbClr val="5B6770"/>
-                </a:solidFill>
-                <a:latin typeface="Arial" pitchFamily="34" charset="0"/>
-                <a:ea typeface="Arial" pitchFamily="34" charset="-122"/>
-                <a:cs typeface="Arial" pitchFamily="34" charset="-120"/>
-              </a:rPr>
-              <a:t>RDA: </a:t>
-            </a:r>
-            <a:pPr indent="0" marL="0">
-              <a:buNone/>
-            </a:pPr>
-            <a:r>
-              <a:rPr lang="en-US" sz="900" dirty="0">
-                <a:solidFill>
-                  <a:srgbClr val="1F2933"/>
-                </a:solidFill>
-                <a:latin typeface="Arial" pitchFamily="34" charset="0"/>
-                <a:ea typeface="Arial" pitchFamily="34" charset="-122"/>
-                <a:cs typeface="Arial" pitchFamily="34" charset="-120"/>
-              </a:rPr>
-              <a:t>R1.3-01M/02M,</a:t>
-            </a:r>
-            <a:endParaRPr lang="en-US" sz="950" dirty="0"/>
-          </a:p>
-          <a:p>
-            <a:pPr indent="0" marL="0">
-              <a:buNone/>
-            </a:pPr>
-            <a:r>
-              <a:rPr lang="en-US" sz="900" dirty="0">
-                <a:solidFill>
-                  <a:srgbClr val="1F2933"/>
-                </a:solidFill>
-                <a:latin typeface="Arial" pitchFamily="34" charset="0"/>
-                <a:ea typeface="Arial" pitchFamily="34" charset="-122"/>
-                <a:cs typeface="Arial" pitchFamily="34" charset="-120"/>
-              </a:rPr>
-              <a:t>I1-01M/02M, R1-01M</a:t>
             </a:r>
             <a:endParaRPr lang="en-US" sz="950" dirty="0"/>
           </a:p>
@@ -2373,8 +2168,8 @@
         </p:nvSpPr>
         <p:spPr>
           <a:xfrm>
-            <a:off x="8046720" y="1609344"/>
-            <a:ext cx="1764792" cy="1133856"/>
+            <a:off x="8046720" y="1901952"/>
+            <a:ext cx="1764792" cy="841248"/>
           </a:xfrm>
           <a:prstGeom prst="rect">
             <a:avLst/>
@@ -2447,54 +2242,6 @@
                 <a:cs typeface="Arial" pitchFamily="34" charset="-120"/>
               </a:rPr>
               <a:t>I2, I3</a:t>
-            </a:r>
-            <a:endParaRPr lang="en-US" sz="950" dirty="0"/>
-          </a:p>
-          <a:p>
-            <a:pPr indent="0" marL="0">
-              <a:buNone/>
-            </a:pPr>
-            <a:r>
-              <a:rPr lang="en-US" sz="900" dirty="0">
-                <a:solidFill>
-                  <a:srgbClr val="5B6770"/>
-                </a:solidFill>
-                <a:latin typeface="Arial" pitchFamily="34" charset="0"/>
-                <a:ea typeface="Arial" pitchFamily="34" charset="-122"/>
-                <a:cs typeface="Arial" pitchFamily="34" charset="-120"/>
-              </a:rPr>
-              <a:t>RDA: </a:t>
-            </a:r>
-            <a:pPr indent="0" marL="0">
-              <a:buNone/>
-            </a:pPr>
-            <a:r>
-              <a:rPr lang="en-US" sz="900" dirty="0">
-                <a:solidFill>
-                  <a:srgbClr val="1F2933"/>
-                </a:solidFill>
-                <a:latin typeface="Arial" pitchFamily="34" charset="0"/>
-                <a:ea typeface="Arial" pitchFamily="34" charset="-122"/>
-                <a:cs typeface="Arial" pitchFamily="34" charset="-120"/>
-              </a:rPr>
-              <a:t>I2-01M/D, I3-01M to 04M,</a:t>
-            </a:r>
-            <a:endParaRPr lang="en-US" sz="950" dirty="0"/>
-          </a:p>
-          <a:p>
-            <a:pPr indent="0" marL="0">
-              <a:buNone/>
-            </a:pPr>
-            <a:r>
-              <a:rPr lang="en-US" sz="900" dirty="0">
-                <a:solidFill>
-                  <a:srgbClr val="1F2933"/>
-                </a:solidFill>
-                <a:latin typeface="Arial" pitchFamily="34" charset="0"/>
-                <a:ea typeface="Arial" pitchFamily="34" charset="-122"/>
-                <a:cs typeface="Arial" pitchFamily="34" charset="-120"/>
-              </a:rPr>
-              <a:t>I3-01D/02D</a:t>
             </a:r>
             <a:endParaRPr lang="en-US" sz="950" dirty="0"/>
           </a:p>
@@ -2702,8 +2449,8 @@
         </p:nvSpPr>
         <p:spPr>
           <a:xfrm>
-            <a:off x="9939528" y="896112"/>
-            <a:ext cx="1764792" cy="1133856"/>
+            <a:off x="9939528" y="1188720"/>
+            <a:ext cx="1764792" cy="841248"/>
           </a:xfrm>
           <a:prstGeom prst="rect">
             <a:avLst/>
@@ -2776,37 +2523,6 @@
                 <a:cs typeface="Arial" pitchFamily="34" charset="-120"/>
               </a:rPr>
               <a:t>F1–F4, A1–A2, R1.1, R1.2</a:t>
-            </a:r>
-            <a:endParaRPr lang="en-US" sz="950" dirty="0"/>
-          </a:p>
-          <a:p>
-            <a:pPr indent="0" marL="0">
-              <a:buNone/>
-            </a:pPr>
-            <a:r>
-              <a:rPr lang="en-US" sz="900" dirty="0">
-                <a:solidFill>
-                  <a:srgbClr val="5B6770"/>
-                </a:solidFill>
-                <a:latin typeface="Arial" pitchFamily="34" charset="0"/>
-                <a:ea typeface="Arial" pitchFamily="34" charset="-122"/>
-                <a:cs typeface="Arial" pitchFamily="34" charset="-120"/>
-              </a:rPr>
-              <a:t>RDA: </a:t>
-            </a:r>
-            <a:pPr indent="0" marL="0">
-              <a:buNone/>
-            </a:pPr>
-            <a:r>
-              <a:rPr lang="en-US" sz="900" dirty="0">
-                <a:solidFill>
-                  <a:srgbClr val="1F2933"/>
-                </a:solidFill>
-                <a:latin typeface="Arial" pitchFamily="34" charset="0"/>
-                <a:ea typeface="Arial" pitchFamily="34" charset="-122"/>
-                <a:cs typeface="Arial" pitchFamily="34" charset="-120"/>
-              </a:rPr>
-              <a:t>all F, A, R1.1, R1.2 indicators</a:t>
             </a:r>
             <a:endParaRPr lang="en-US" sz="950" dirty="0"/>
           </a:p>
@@ -3120,7 +2836,7 @@
                 <a:ea typeface="Arial" pitchFamily="34" charset="-122"/>
                 <a:cs typeface="Arial" pitchFamily="34" charset="-120"/>
               </a:rPr>
-              <a:t>Numbers 1–6 are the layers of Fig. 1 and Table 1. FAIR = FAIR principles mainly addressed; RDA = main RDA FAIR Data Maturity Model indicators (prefix omitted; M metadata, D data). Definitions in the speaker notes; full mapping in Table 2 and Suppl. Table S2.</a:t>
+              <a:t>Numbers 1–6 are the layers of Fig. 1 and Table 1. FAIR = FAIR principles mainly addressed (full text in the speaker notes).</a:t>
             </a:r>
             <a:endParaRPr lang="en-US" sz="900" dirty="0"/>
           </a:p>

--- a/figures/fig2_fair_levels/fig2_fair_levels_design.pptx
+++ b/figures/fig2_fair_levels/fig2_fair_levels_design.pptx
@@ -4,12 +4,12 @@
   <p:sldMasterIdLst>
     <p:sldMasterId id="2147483648" r:id="rId1"/>
   </p:sldMasterIdLst>
+  <p:notesMasterIdLst>
+    <p:notesMasterId r:id="rId3"/>
+  </p:notesMasterIdLst>
   <p:sldIdLst>
     <p:sldId id="256" r:id="rId2"/>
   </p:sldIdLst>
-  <p:notesMasterIdLst>
-    <p:notesMasterId r:id="rId3"/>
-  </p:notesMasterIdLst>
   <p:sldSz cx="12192000" cy="6858000"/>
   <p:notesSz cx="6858000" cy="12192000"/>
   <p:defaultTextStyle>
@@ -104,6 +104,11 @@
       </a:defRPr>
     </a:lvl9pPr>
   </p:defaultTextStyle>
+  <p:extLst>
+    <p:ext uri="{EFAFB233-063F-42B5-8137-9DF3F51BA10A}">
+      <p15:sldGuideLst xmlns:p15="http://schemas.microsoft.com/office/powerpoint/2012/main"/>
+    </p:ext>
+  </p:extLst>
 </p:presentation>
 </file>
 
@@ -129,234 +134,10 @@
           <a:chExt cx="0" cy="0"/>
         </a:xfrm>
       </p:grpSpPr>
-      <p:sp>
-        <p:nvSpPr>
-          <p:cNvPr id="2" name="Header Placeholder 1"/>
-          <p:cNvSpPr>
-            <a:spLocks noGrp="1"/>
-          </p:cNvSpPr>
-          <p:nvPr>
-            <p:ph type="hdr" sz="quarter"/>
-          </p:nvPr>
-        </p:nvSpPr>
-        <p:spPr>
-          <a:xfrm>
-            <a:off x="0" y="0"/>
-            <a:ext cx="2971800" cy="458788"/>
-          </a:xfrm>
-          <a:prstGeom prst="rect">
-            <a:avLst/>
-          </a:prstGeom>
-        </p:spPr>
-        <p:txBody>
-          <a:bodyPr vert="horz" lIns="91440" tIns="45720" rIns="91440" bIns="45720" rtlCol="0"/>
-          <a:lstStyle>
-            <a:lvl1pPr algn="l">
-              <a:defRPr sz="1200"/>
-            </a:lvl1pPr>
-          </a:lstStyle>
-          <a:p>
-            <a:endParaRPr lang="en-US"/>
-          </a:p>
-        </p:txBody>
-      </p:sp>
-      <p:sp>
-        <p:nvSpPr>
-          <p:cNvPr id="3" name="Date Placeholder 2"/>
-          <p:cNvSpPr>
-            <a:spLocks noGrp="1"/>
-          </p:cNvSpPr>
-          <p:nvPr>
-            <p:ph type="dt" idx="1"/>
-          </p:nvPr>
-        </p:nvSpPr>
-        <p:spPr>
-          <a:xfrm>
-            <a:off x="3884613" y="0"/>
-            <a:ext cx="2971800" cy="458788"/>
-          </a:xfrm>
-          <a:prstGeom prst="rect">
-            <a:avLst/>
-          </a:prstGeom>
-        </p:spPr>
-        <p:txBody>
-          <a:bodyPr vert="horz" lIns="91440" tIns="45720" rIns="91440" bIns="45720" rtlCol="0"/>
-          <a:lstStyle>
-            <a:lvl1pPr algn="r">
-              <a:defRPr sz="1200"/>
-            </a:lvl1pPr>
-          </a:lstStyle>
-          <a:p>
-            <a:fld id="{5282F153-3F37-0F45-9E97-73ACFA13230C}" type="datetimeFigureOut">
-              <a:rPr lang="en-US"/>
-              <a:t>7/23/19</a:t>
-            </a:fld>
-            <a:endParaRPr lang="en-US"/>
-          </a:p>
-        </p:txBody>
-      </p:sp>
-      <p:sp>
-        <p:nvSpPr>
-          <p:cNvPr id="4" name="Slide Image Placeholder 3"/>
-          <p:cNvSpPr>
-            <a:spLocks noGrp="1" noRot="1" noChangeAspect="1"/>
-          </p:cNvSpPr>
-          <p:nvPr>
-            <p:ph type="sldImg" idx="2"/>
-          </p:nvPr>
-        </p:nvSpPr>
-        <p:spPr>
-          <a:xfrm>
-            <a:off x="685800" y="1143000"/>
-            <a:ext cx="5486400" cy="3086100"/>
-          </a:xfrm>
-          <a:prstGeom prst="rect">
-            <a:avLst/>
-          </a:prstGeom>
-          <a:noFill/>
-          <a:ln w="12700">
-            <a:solidFill>
-              <a:prstClr val="black"/>
-            </a:solidFill>
-          </a:ln>
-        </p:spPr>
-        <p:txBody>
-          <a:bodyPr vert="horz" lIns="91440" tIns="45720" rIns="91440" bIns="45720" rtlCol="0" anchor="ctr"/>
-          <a:lstStyle/>
-          <a:p>
-            <a:endParaRPr lang="en-US"/>
-          </a:p>
-        </p:txBody>
-      </p:sp>
-      <p:sp>
-        <p:nvSpPr>
-          <p:cNvPr id="5" name="Notes Placeholder 4"/>
-          <p:cNvSpPr>
-            <a:spLocks noGrp="1"/>
-          </p:cNvSpPr>
-          <p:nvPr>
-            <p:ph type="body" sz="quarter" idx="3"/>
-          </p:nvPr>
-        </p:nvSpPr>
-        <p:spPr>
-          <a:xfrm>
-            <a:off x="685800" y="4400550"/>
-            <a:ext cx="5486400" cy="3600450"/>
-          </a:xfrm>
-          <a:prstGeom prst="rect">
-            <a:avLst/>
-          </a:prstGeom>
-        </p:spPr>
-        <p:txBody>
-          <a:bodyPr vert="horz" lIns="91440" tIns="45720" rIns="91440" bIns="45720" rtlCol="0"/>
-          <a:lstStyle/>
-          <a:p>
-            <a:pPr lvl="0"/>
-            <a:r>
-              <a:rPr lang="en-US"/>
-              <a:t>Click to edit Master text styles</a:t>
-            </a:r>
-          </a:p>
-          <a:p>
-            <a:pPr lvl="1"/>
-            <a:r>
-              <a:rPr lang="en-US"/>
-              <a:t>Second level</a:t>
-            </a:r>
-          </a:p>
-          <a:p>
-            <a:pPr lvl="2"/>
-            <a:r>
-              <a:rPr lang="en-US"/>
-              <a:t>Third level</a:t>
-            </a:r>
-          </a:p>
-          <a:p>
-            <a:pPr lvl="3"/>
-            <a:r>
-              <a:rPr lang="en-US"/>
-              <a:t>Fourth level</a:t>
-            </a:r>
-          </a:p>
-          <a:p>
-            <a:pPr lvl="4"/>
-            <a:r>
-              <a:rPr lang="en-US"/>
-              <a:t>Fifth level</a:t>
-            </a:r>
-          </a:p>
-        </p:txBody>
-      </p:sp>
-      <p:sp>
-        <p:nvSpPr>
-          <p:cNvPr id="6" name="Footer Placeholder 5"/>
-          <p:cNvSpPr>
-            <a:spLocks noGrp="1"/>
-          </p:cNvSpPr>
-          <p:nvPr>
-            <p:ph type="ftr" sz="quarter" idx="4"/>
-          </p:nvPr>
-        </p:nvSpPr>
-        <p:spPr>
-          <a:xfrm>
-            <a:off x="0" y="8685213"/>
-            <a:ext cx="2971800" cy="458787"/>
-          </a:xfrm>
-          <a:prstGeom prst="rect">
-            <a:avLst/>
-          </a:prstGeom>
-        </p:spPr>
-        <p:txBody>
-          <a:bodyPr vert="horz" lIns="91440" tIns="45720" rIns="91440" bIns="45720" rtlCol="0" anchor="b"/>
-          <a:lstStyle>
-            <a:lvl1pPr algn="l">
-              <a:defRPr sz="1200"/>
-            </a:lvl1pPr>
-          </a:lstStyle>
-          <a:p>
-            <a:endParaRPr lang="en-US"/>
-          </a:p>
-        </p:txBody>
-      </p:sp>
-      <p:sp>
-        <p:nvSpPr>
-          <p:cNvPr id="7" name="Slide Number Placeholder 6"/>
-          <p:cNvSpPr>
-            <a:spLocks noGrp="1"/>
-          </p:cNvSpPr>
-          <p:nvPr>
-            <p:ph type="sldNum" sz="quarter" idx="5"/>
-          </p:nvPr>
-        </p:nvSpPr>
-        <p:spPr>
-          <a:xfrm>
-            <a:off x="3884613" y="8685213"/>
-            <a:ext cx="2971800" cy="458787"/>
-          </a:xfrm>
-          <a:prstGeom prst="rect">
-            <a:avLst/>
-          </a:prstGeom>
-        </p:spPr>
-        <p:txBody>
-          <a:bodyPr vert="horz" lIns="91440" tIns="45720" rIns="91440" bIns="45720" rtlCol="0" anchor="b"/>
-          <a:lstStyle>
-            <a:lvl1pPr algn="r">
-              <a:defRPr sz="1200"/>
-            </a:lvl1pPr>
-          </a:lstStyle>
-          <a:p>
-            <a:fld id="{CE5E9CC1-C706-0F49-92D6-E571CC5EEA8F}" type="slidenum">
-              <a:rPr lang="en-US"/>
-              <a:t>‹#›</a:t>
-            </a:fld>
-            <a:endParaRPr lang="en-US"/>
-          </a:p>
-        </p:txBody>
-      </p:sp>
     </p:spTree>
     <p:extLst>
       <p:ext uri="{BB962C8B-B14F-4D97-AF65-F5344CB8AC3E}">
-        <p14:creationId xmlns:p14="http://schemas.microsoft.com/office/powerpoint/2010/main" val="1024086991"/>
+        <p14:creationId xmlns:p14="http://schemas.microsoft.com/office/powerpoint/2010/main" val="4130015199"/>
       </p:ext>
     </p:extLst>
   </p:cSld>
@@ -535,7 +316,6 @@
   R1.1: (Meta)data are released with a clear and accessible data usage licence.
   R1.2: (Meta)data are associated with detailed provenance.</a:t>
             </a:r>
-            <a:endParaRPr lang="en-US" dirty="0"/>
           </a:p>
         </p:txBody>
       </p:sp>
@@ -608,6 +388,11 @@
 <file path=ppt/slideMasters/slideMaster1.xml><?xml version="1.0" encoding="utf-8"?>
 <p:sldMaster xmlns:a="http://schemas.openxmlformats.org/drawingml/2006/main" xmlns:r="http://schemas.openxmlformats.org/officeDocument/2006/relationships" xmlns:p="http://schemas.openxmlformats.org/presentationml/2006/main">
   <p:cSld>
+    <p:bg>
+      <p:bgRef idx="1001">
+        <a:schemeClr val="bg1"/>
+      </p:bgRef>
+    </p:bg>
     <p:spTree>
       <p:nvGrpSpPr>
         <p:cNvPr id="1" name=""/>
@@ -890,6 +675,7 @@
         <a:solidFill>
           <a:srgbClr val="FFFFFF"/>
         </a:solidFill>
+        <a:effectLst/>
       </p:bgPr>
     </p:bg>
     <p:spTree>
@@ -932,6 +718,13 @@
             <a:prstDash val="solid"/>
           </a:ln>
         </p:spPr>
+        <p:txBody>
+          <a:bodyPr/>
+          <a:lstStyle/>
+          <a:p>
+            <a:endParaRPr lang="en-US"/>
+          </a:p>
+        </p:txBody>
       </p:sp>
       <p:sp>
         <p:nvSpPr>
@@ -957,6 +750,13 @@
             <a:prstDash val="solid"/>
           </a:ln>
         </p:spPr>
+        <p:txBody>
+          <a:bodyPr/>
+          <a:lstStyle/>
+          <a:p>
+            <a:endParaRPr lang="en-US"/>
+          </a:p>
+        </p:txBody>
       </p:sp>
       <p:sp>
         <p:nvSpPr>
@@ -979,11 +779,11 @@
           <a:bodyPr wrap="square" lIns="0" tIns="0" rIns="0" bIns="0" rtlCol="0" anchor="ctr"/>
           <a:lstStyle/>
           <a:p>
-            <a:pPr indent="0" marL="0">
-              <a:buNone/>
-            </a:pPr>
-            <a:r>
-              <a:rPr lang="en-US" sz="950" b="1" dirty="0">
+            <a:pPr marL="0" indent="0">
+              <a:buNone/>
+            </a:pPr>
+            <a:r>
+              <a:rPr lang="en-US" sz="1200" b="1" dirty="0">
                 <a:solidFill>
                   <a:srgbClr val="1F2933"/>
                 </a:solidFill>
@@ -993,7 +793,7 @@
               </a:rPr>
               <a:t>No standard</a:t>
             </a:r>
-            <a:endParaRPr lang="en-US" sz="950" dirty="0"/>
+            <a:endParaRPr lang="en-US" sz="1200" dirty="0"/>
           </a:p>
         </p:txBody>
       </p:sp>
@@ -1006,7 +806,7 @@
         <p:spPr>
           <a:xfrm>
             <a:off x="548640" y="6053328"/>
-            <a:ext cx="1618488" cy="329184"/>
+            <a:ext cx="1618488" cy="210312"/>
           </a:xfrm>
           <a:prstGeom prst="rect">
             <a:avLst/>
@@ -1018,11 +818,11 @@
           <a:bodyPr wrap="square" lIns="0" tIns="0" rIns="0" bIns="0" rtlCol="0" anchor="t"/>
           <a:lstStyle/>
           <a:p>
-            <a:pPr indent="0" marL="0">
-              <a:buNone/>
-            </a:pPr>
-            <a:r>
-              <a:rPr lang="en-US" sz="900" i="1" dirty="0">
+            <a:pPr marL="0" indent="0">
+              <a:buNone/>
+            </a:pPr>
+            <a:r>
+              <a:rPr lang="en-US" sz="1050" i="1" dirty="0">
                 <a:solidFill>
                   <a:srgbClr val="5B6770"/>
                 </a:solidFill>
@@ -1032,7 +832,7 @@
               </a:rPr>
               <a:t>Raw .bin voltage traces</a:t>
             </a:r>
-            <a:endParaRPr lang="en-US" sz="900" dirty="0"/>
+            <a:endParaRPr lang="en-US" sz="1050" dirty="0"/>
           </a:p>
         </p:txBody>
       </p:sp>
@@ -1057,11 +857,11 @@
           <a:bodyPr wrap="square" lIns="0" tIns="0" rIns="0" bIns="0" rtlCol="0" anchor="b"/>
           <a:lstStyle/>
           <a:p>
-            <a:pPr indent="0" marL="0">
-              <a:buNone/>
-            </a:pPr>
-            <a:r>
-              <a:rPr lang="en-US" sz="950" dirty="0">
+            <a:pPr marL="0" indent="0">
+              <a:buNone/>
+            </a:pPr>
+            <a:r>
+              <a:rPr lang="en-US" sz="1050" dirty="0">
                 <a:solidFill>
                   <a:srgbClr val="5B6770"/>
                 </a:solidFill>
@@ -1071,14 +871,14 @@
               </a:rPr>
               <a:t>Level 0</a:t>
             </a:r>
-            <a:endParaRPr lang="en-US" sz="950" dirty="0"/>
-          </a:p>
-          <a:p>
-            <a:pPr indent="0" marL="0">
-              <a:buNone/>
-            </a:pPr>
-            <a:r>
-              <a:rPr lang="en-US" sz="1200" b="1" dirty="0">
+            <a:endParaRPr lang="en-US" sz="1050" dirty="0"/>
+          </a:p>
+          <a:p>
+            <a:pPr marL="0" indent="0">
+              <a:buNone/>
+            </a:pPr>
+            <a:r>
+              <a:rPr lang="en-US" sz="1600" b="1" dirty="0">
                 <a:solidFill>
                   <a:srgbClr val="1F2933"/>
                 </a:solidFill>
@@ -1088,14 +888,14 @@
               </a:rPr>
               <a:t>Opaque</a:t>
             </a:r>
-            <a:endParaRPr lang="en-US" sz="950" dirty="0"/>
-          </a:p>
-          <a:p>
-            <a:pPr indent="0" marL="0">
-              <a:buNone/>
-            </a:pPr>
-            <a:r>
-              <a:rPr lang="en-US" sz="900" dirty="0">
+            <a:endParaRPr lang="en-US" sz="1050" dirty="0"/>
+          </a:p>
+          <a:p>
+            <a:pPr marL="0" indent="0">
+              <a:buNone/>
+            </a:pPr>
+            <a:r>
+              <a:rPr lang="en-US" sz="1050" dirty="0">
                 <a:solidFill>
                   <a:srgbClr val="5B6770"/>
                 </a:solidFill>
@@ -1105,11 +905,8 @@
               </a:rPr>
               <a:t>FAIR: </a:t>
             </a:r>
-            <a:pPr indent="0" marL="0">
-              <a:buNone/>
-            </a:pPr>
-            <a:r>
-              <a:rPr lang="en-US" sz="900" dirty="0">
+            <a:r>
+              <a:rPr lang="en-US" sz="1050" dirty="0">
                 <a:solidFill>
                   <a:srgbClr val="1F2933"/>
                 </a:solidFill>
@@ -1119,7 +916,7 @@
               </a:rPr>
               <a:t>none</a:t>
             </a:r>
-            <a:endParaRPr lang="en-US" sz="950" dirty="0"/>
+            <a:endParaRPr lang="en-US" sz="1050" dirty="0"/>
           </a:p>
         </p:txBody>
       </p:sp>
@@ -1149,6 +946,13 @@
             <a:prstDash val="solid"/>
           </a:ln>
         </p:spPr>
+        <p:txBody>
+          <a:bodyPr/>
+          <a:lstStyle/>
+          <a:p>
+            <a:endParaRPr lang="en-US"/>
+          </a:p>
+        </p:txBody>
       </p:sp>
       <p:sp>
         <p:nvSpPr>
@@ -1174,6 +978,13 @@
             <a:prstDash val="solid"/>
           </a:ln>
         </p:spPr>
+        <p:txBody>
+          <a:bodyPr/>
+          <a:lstStyle/>
+          <a:p>
+            <a:endParaRPr lang="en-US"/>
+          </a:p>
+        </p:txBody>
       </p:sp>
       <p:sp>
         <p:nvSpPr>
@@ -1199,6 +1010,13 @@
             <a:prstDash val="solid"/>
           </a:ln>
         </p:spPr>
+        <p:txBody>
+          <a:bodyPr/>
+          <a:lstStyle/>
+          <a:p>
+            <a:endParaRPr lang="en-US"/>
+          </a:p>
+        </p:txBody>
       </p:sp>
       <p:sp>
         <p:nvSpPr>
@@ -1221,7 +1039,7 @@
           <a:bodyPr wrap="square" lIns="0" tIns="0" rIns="0" bIns="0" rtlCol="0" anchor="ctr"/>
           <a:lstStyle/>
           <a:p>
-            <a:pPr algn="ctr" indent="0" marL="0">
+            <a:pPr marL="0" indent="0" algn="ctr">
               <a:buNone/>
             </a:pPr>
             <a:r>
@@ -1260,11 +1078,11 @@
           <a:bodyPr wrap="square" lIns="0" tIns="0" rIns="0" bIns="0" rtlCol="0" anchor="ctr"/>
           <a:lstStyle/>
           <a:p>
-            <a:pPr indent="0" marL="0">
-              <a:buNone/>
-            </a:pPr>
-            <a:r>
-              <a:rPr lang="en-US" sz="950" b="1" dirty="0">
+            <a:pPr marL="0" indent="0">
+              <a:buNone/>
+            </a:pPr>
+            <a:r>
+              <a:rPr lang="en-US" sz="1200" b="1" dirty="0">
                 <a:solidFill>
                   <a:srgbClr val="1F2933"/>
                 </a:solidFill>
@@ -1274,7 +1092,7 @@
               </a:rPr>
               <a:t>Data formats</a:t>
             </a:r>
-            <a:endParaRPr lang="en-US" sz="950" dirty="0"/>
+            <a:endParaRPr lang="en-US" sz="1200" dirty="0"/>
           </a:p>
         </p:txBody>
       </p:sp>
@@ -1287,7 +1105,7 @@
         <p:spPr>
           <a:xfrm>
             <a:off x="2441448" y="5541264"/>
-            <a:ext cx="1618488" cy="329184"/>
+            <a:ext cx="1618488" cy="210312"/>
           </a:xfrm>
           <a:prstGeom prst="rect">
             <a:avLst/>
@@ -1299,11 +1117,11 @@
           <a:bodyPr wrap="square" lIns="0" tIns="0" rIns="0" bIns="0" rtlCol="0" anchor="t"/>
           <a:lstStyle/>
           <a:p>
-            <a:pPr indent="0" marL="0">
-              <a:buNone/>
-            </a:pPr>
-            <a:r>
-              <a:rPr lang="en-US" sz="900" i="1" dirty="0">
+            <a:pPr marL="0" indent="0">
+              <a:buNone/>
+            </a:pPr>
+            <a:r>
+              <a:rPr lang="en-US" sz="1050" i="1" dirty="0">
                 <a:solidFill>
                   <a:srgbClr val="5B6770"/>
                 </a:solidFill>
@@ -1311,9 +1129,9 @@
                 <a:ea typeface="Arial" pitchFamily="34" charset="-122"/>
                 <a:cs typeface="Arial" pitchFamily="34" charset="-120"/>
               </a:rPr>
-              <a:t>Bare HDF5 file</a:t>
-            </a:r>
-            <a:endParaRPr lang="en-US" sz="900" dirty="0"/>
+              <a:t>Bare HDF5 or Zarr file</a:t>
+            </a:r>
+            <a:endParaRPr lang="en-US" sz="1050" dirty="0"/>
           </a:p>
         </p:txBody>
       </p:sp>
@@ -1338,11 +1156,11 @@
           <a:bodyPr wrap="square" lIns="0" tIns="0" rIns="0" bIns="0" rtlCol="0" anchor="b"/>
           <a:lstStyle/>
           <a:p>
-            <a:pPr indent="0" marL="0">
-              <a:buNone/>
-            </a:pPr>
-            <a:r>
-              <a:rPr lang="en-US" sz="950" dirty="0">
+            <a:pPr marL="0" indent="0">
+              <a:buNone/>
+            </a:pPr>
+            <a:r>
+              <a:rPr lang="en-US" sz="1050" dirty="0">
                 <a:solidFill>
                   <a:srgbClr val="5B6770"/>
                 </a:solidFill>
@@ -1352,14 +1170,14 @@
               </a:rPr>
               <a:t>Level 1</a:t>
             </a:r>
-            <a:endParaRPr lang="en-US" sz="950" dirty="0"/>
-          </a:p>
-          <a:p>
-            <a:pPr indent="0" marL="0">
-              <a:buNone/>
-            </a:pPr>
-            <a:r>
-              <a:rPr lang="en-US" sz="1200" b="1" dirty="0">
+            <a:endParaRPr lang="en-US" sz="1050" dirty="0"/>
+          </a:p>
+          <a:p>
+            <a:pPr marL="0" indent="0">
+              <a:buNone/>
+            </a:pPr>
+            <a:r>
+              <a:rPr lang="en-US" sz="1600" b="1" dirty="0">
                 <a:solidFill>
                   <a:srgbClr val="1F2933"/>
                 </a:solidFill>
@@ -1369,14 +1187,14 @@
               </a:rPr>
               <a:t>Readable</a:t>
             </a:r>
-            <a:endParaRPr lang="en-US" sz="950" dirty="0"/>
-          </a:p>
-          <a:p>
-            <a:pPr indent="0" marL="0">
-              <a:buNone/>
-            </a:pPr>
-            <a:r>
-              <a:rPr lang="en-US" sz="900" dirty="0">
+            <a:endParaRPr lang="en-US" sz="1050" dirty="0"/>
+          </a:p>
+          <a:p>
+            <a:pPr marL="0" indent="0">
+              <a:buNone/>
+            </a:pPr>
+            <a:r>
+              <a:rPr lang="en-US" sz="1050" dirty="0">
                 <a:solidFill>
                   <a:srgbClr val="5B6770"/>
                 </a:solidFill>
@@ -1386,11 +1204,8 @@
               </a:rPr>
               <a:t>FAIR: </a:t>
             </a:r>
-            <a:pPr indent="0" marL="0">
-              <a:buNone/>
-            </a:pPr>
-            <a:r>
-              <a:rPr lang="en-US" sz="900" dirty="0">
+            <a:r>
+              <a:rPr lang="en-US" sz="1050" dirty="0">
                 <a:solidFill>
                   <a:srgbClr val="1F2933"/>
                 </a:solidFill>
@@ -1400,7 +1215,7 @@
               </a:rPr>
               <a:t>I1</a:t>
             </a:r>
-            <a:endParaRPr lang="en-US" sz="950" dirty="0"/>
+            <a:endParaRPr lang="en-US" sz="1050" dirty="0"/>
           </a:p>
         </p:txBody>
       </p:sp>
@@ -1430,6 +1245,13 @@
             <a:prstDash val="solid"/>
           </a:ln>
         </p:spPr>
+        <p:txBody>
+          <a:bodyPr/>
+          <a:lstStyle/>
+          <a:p>
+            <a:endParaRPr lang="en-US"/>
+          </a:p>
+        </p:txBody>
       </p:sp>
       <p:sp>
         <p:nvSpPr>
@@ -1455,6 +1277,13 @@
             <a:prstDash val="solid"/>
           </a:ln>
         </p:spPr>
+        <p:txBody>
+          <a:bodyPr/>
+          <a:lstStyle/>
+          <a:p>
+            <a:endParaRPr lang="en-US"/>
+          </a:p>
+        </p:txBody>
       </p:sp>
       <p:sp>
         <p:nvSpPr>
@@ -1480,6 +1309,13 @@
             <a:prstDash val="solid"/>
           </a:ln>
         </p:spPr>
+        <p:txBody>
+          <a:bodyPr/>
+          <a:lstStyle/>
+          <a:p>
+            <a:endParaRPr lang="en-US"/>
+          </a:p>
+        </p:txBody>
       </p:sp>
       <p:sp>
         <p:nvSpPr>
@@ -1502,7 +1338,7 @@
           <a:bodyPr wrap="square" lIns="0" tIns="0" rIns="0" bIns="0" rtlCol="0" anchor="ctr"/>
           <a:lstStyle/>
           <a:p>
-            <a:pPr algn="ctr" indent="0" marL="0">
+            <a:pPr marL="0" indent="0" algn="ctr">
               <a:buNone/>
             </a:pPr>
             <a:r>
@@ -1541,11 +1377,11 @@
           <a:bodyPr wrap="square" lIns="0" tIns="0" rIns="0" bIns="0" rtlCol="0" anchor="ctr"/>
           <a:lstStyle/>
           <a:p>
-            <a:pPr indent="0" marL="0">
-              <a:buNone/>
-            </a:pPr>
-            <a:r>
-              <a:rPr lang="en-US" sz="950" b="1" dirty="0">
+            <a:pPr marL="0" indent="0">
+              <a:buNone/>
+            </a:pPr>
+            <a:r>
+              <a:rPr lang="en-US" sz="1200" b="1" dirty="0">
                 <a:solidFill>
                   <a:srgbClr val="1F2933"/>
                 </a:solidFill>
@@ -1555,7 +1391,7 @@
               </a:rPr>
               <a:t>File organization standards</a:t>
             </a:r>
-            <a:endParaRPr lang="en-US" sz="950" dirty="0"/>
+            <a:endParaRPr lang="en-US" sz="1200" dirty="0"/>
           </a:p>
         </p:txBody>
       </p:sp>
@@ -1568,7 +1404,7 @@
         <p:spPr>
           <a:xfrm>
             <a:off x="4334256" y="4828032"/>
-            <a:ext cx="1618488" cy="329184"/>
+            <a:ext cx="1618488" cy="210312"/>
           </a:xfrm>
           <a:prstGeom prst="rect">
             <a:avLst/>
@@ -1580,11 +1416,11 @@
           <a:bodyPr wrap="square" lIns="0" tIns="0" rIns="0" bIns="0" rtlCol="0" anchor="t"/>
           <a:lstStyle/>
           <a:p>
-            <a:pPr indent="0" marL="0">
-              <a:buNone/>
-            </a:pPr>
-            <a:r>
-              <a:rPr lang="en-US" sz="900" i="1" dirty="0">
+            <a:pPr marL="0" indent="0">
+              <a:buNone/>
+            </a:pPr>
+            <a:r>
+              <a:rPr lang="en-US" sz="1050" i="1" dirty="0">
                 <a:solidFill>
                   <a:srgbClr val="5B6770"/>
                 </a:solidFill>
@@ -1594,7 +1430,7 @@
               </a:rPr>
               <a:t>Validated NWB file</a:t>
             </a:r>
-            <a:endParaRPr lang="en-US" sz="900" dirty="0"/>
+            <a:endParaRPr lang="en-US" sz="1050" dirty="0"/>
           </a:p>
         </p:txBody>
       </p:sp>
@@ -1619,11 +1455,11 @@
           <a:bodyPr wrap="square" lIns="0" tIns="0" rIns="0" bIns="0" rtlCol="0" anchor="b"/>
           <a:lstStyle/>
           <a:p>
-            <a:pPr indent="0" marL="0">
-              <a:buNone/>
-            </a:pPr>
-            <a:r>
-              <a:rPr lang="en-US" sz="950" dirty="0">
+            <a:pPr marL="0" indent="0">
+              <a:buNone/>
+            </a:pPr>
+            <a:r>
+              <a:rPr lang="en-US" sz="1050" dirty="0">
                 <a:solidFill>
                   <a:srgbClr val="5B6770"/>
                 </a:solidFill>
@@ -1633,14 +1469,14 @@
               </a:rPr>
               <a:t>Level 2</a:t>
             </a:r>
-            <a:endParaRPr lang="en-US" sz="950" dirty="0"/>
-          </a:p>
-          <a:p>
-            <a:pPr indent="0" marL="0">
-              <a:buNone/>
-            </a:pPr>
-            <a:r>
-              <a:rPr lang="en-US" sz="1200" b="1" dirty="0">
+            <a:endParaRPr lang="en-US" sz="1050" dirty="0"/>
+          </a:p>
+          <a:p>
+            <a:pPr marL="0" indent="0">
+              <a:buNone/>
+            </a:pPr>
+            <a:r>
+              <a:rPr lang="en-US" sz="1600" b="1" dirty="0">
                 <a:solidFill>
                   <a:srgbClr val="1F2933"/>
                 </a:solidFill>
@@ -1650,14 +1486,14 @@
               </a:rPr>
               <a:t>Interpretable files</a:t>
             </a:r>
-            <a:endParaRPr lang="en-US" sz="950" dirty="0"/>
-          </a:p>
-          <a:p>
-            <a:pPr indent="0" marL="0">
-              <a:buNone/>
-            </a:pPr>
-            <a:r>
-              <a:rPr lang="en-US" sz="900" dirty="0">
+            <a:endParaRPr lang="en-US" sz="1050" dirty="0"/>
+          </a:p>
+          <a:p>
+            <a:pPr marL="0" indent="0">
+              <a:buNone/>
+            </a:pPr>
+            <a:r>
+              <a:rPr lang="en-US" sz="1050" dirty="0">
                 <a:solidFill>
                   <a:srgbClr val="5B6770"/>
                 </a:solidFill>
@@ -1667,11 +1503,8 @@
               </a:rPr>
               <a:t>FAIR: </a:t>
             </a:r>
-            <a:pPr indent="0" marL="0">
-              <a:buNone/>
-            </a:pPr>
-            <a:r>
-              <a:rPr lang="en-US" sz="900" dirty="0">
+            <a:r>
+              <a:rPr lang="en-US" sz="1050" dirty="0">
                 <a:solidFill>
                   <a:srgbClr val="1F2933"/>
                 </a:solidFill>
@@ -1681,7 +1514,7 @@
               </a:rPr>
               <a:t>R1, R1.3</a:t>
             </a:r>
-            <a:endParaRPr lang="en-US" sz="950" dirty="0"/>
+            <a:endParaRPr lang="en-US" sz="1050" dirty="0"/>
           </a:p>
         </p:txBody>
       </p:sp>
@@ -1711,6 +1544,13 @@
             <a:prstDash val="solid"/>
           </a:ln>
         </p:spPr>
+        <p:txBody>
+          <a:bodyPr/>
+          <a:lstStyle/>
+          <a:p>
+            <a:endParaRPr lang="en-US"/>
+          </a:p>
+        </p:txBody>
       </p:sp>
       <p:sp>
         <p:nvSpPr>
@@ -1736,6 +1576,13 @@
             <a:prstDash val="solid"/>
           </a:ln>
         </p:spPr>
+        <p:txBody>
+          <a:bodyPr/>
+          <a:lstStyle/>
+          <a:p>
+            <a:endParaRPr lang="en-US"/>
+          </a:p>
+        </p:txBody>
       </p:sp>
       <p:sp>
         <p:nvSpPr>
@@ -1761,6 +1608,13 @@
             <a:prstDash val="solid"/>
           </a:ln>
         </p:spPr>
+        <p:txBody>
+          <a:bodyPr/>
+          <a:lstStyle/>
+          <a:p>
+            <a:endParaRPr lang="en-US"/>
+          </a:p>
+        </p:txBody>
       </p:sp>
       <p:sp>
         <p:nvSpPr>
@@ -1783,7 +1637,7 @@
           <a:bodyPr wrap="square" lIns="0" tIns="0" rIns="0" bIns="0" rtlCol="0" anchor="ctr"/>
           <a:lstStyle/>
           <a:p>
-            <a:pPr algn="ctr" indent="0" marL="0">
+            <a:pPr marL="0" indent="0" algn="ctr">
               <a:buNone/>
             </a:pPr>
             <a:r>
@@ -1809,8 +1663,8 @@
         </p:nvSpPr>
         <p:spPr>
           <a:xfrm>
-            <a:off x="6556248" y="3694176"/>
-            <a:ext cx="1307592" cy="347472"/>
+            <a:off x="6583680" y="3739896"/>
+            <a:ext cx="1371600" cy="347472"/>
           </a:xfrm>
           <a:prstGeom prst="rect">
             <a:avLst/>
@@ -1822,11 +1676,11 @@
           <a:bodyPr wrap="square" lIns="0" tIns="0" rIns="0" bIns="0" rtlCol="0" anchor="ctr"/>
           <a:lstStyle/>
           <a:p>
-            <a:pPr indent="0" marL="0">
-              <a:buNone/>
-            </a:pPr>
-            <a:r>
-              <a:rPr lang="en-US" sz="950" b="1" dirty="0">
+            <a:pPr marL="0" indent="0">
+              <a:buNone/>
+            </a:pPr>
+            <a:r>
+              <a:rPr lang="en-US" sz="1200" b="1" dirty="0">
                 <a:solidFill>
                   <a:srgbClr val="1F2933"/>
                 </a:solidFill>
@@ -1836,7 +1690,7 @@
               </a:rPr>
               <a:t>Dataset organization standards</a:t>
             </a:r>
-            <a:endParaRPr lang="en-US" sz="950" dirty="0"/>
+            <a:endParaRPr lang="en-US" sz="1200" dirty="0"/>
           </a:p>
         </p:txBody>
       </p:sp>
@@ -1848,8 +1702,8 @@
         </p:nvSpPr>
         <p:spPr>
           <a:xfrm>
-            <a:off x="6227064" y="4114800"/>
-            <a:ext cx="1618488" cy="329184"/>
+            <a:off x="6181344" y="4251960"/>
+            <a:ext cx="1691640" cy="173736"/>
           </a:xfrm>
           <a:prstGeom prst="rect">
             <a:avLst/>
@@ -1861,11 +1715,11 @@
           <a:bodyPr wrap="square" lIns="0" tIns="0" rIns="0" bIns="0" rtlCol="0" anchor="t"/>
           <a:lstStyle/>
           <a:p>
-            <a:pPr indent="0" marL="0">
-              <a:buNone/>
-            </a:pPr>
-            <a:r>
-              <a:rPr lang="en-US" sz="900" i="1" dirty="0">
+            <a:pPr marL="0" indent="0">
+              <a:buNone/>
+            </a:pPr>
+            <a:r>
+              <a:rPr lang="en-US" sz="1050" i="1" dirty="0">
                 <a:solidFill>
                   <a:srgbClr val="5B6770"/>
                 </a:solidFill>
@@ -1873,9 +1727,9 @@
                 <a:ea typeface="Arial" pitchFamily="34" charset="-122"/>
                 <a:cs typeface="Arial" pitchFamily="34" charset="-120"/>
               </a:rPr>
-              <a:t>BIDS or DANDI-layout dataset</a:t>
-            </a:r>
-            <a:endParaRPr lang="en-US" sz="900" dirty="0"/>
+              <a:t>Standardized files organized in a BIDS dataset</a:t>
+            </a:r>
+            <a:endParaRPr lang="en-US" sz="1050" dirty="0"/>
           </a:p>
         </p:txBody>
       </p:sp>
@@ -1900,11 +1754,11 @@
           <a:bodyPr wrap="square" lIns="0" tIns="0" rIns="0" bIns="0" rtlCol="0" anchor="b"/>
           <a:lstStyle/>
           <a:p>
-            <a:pPr indent="0" marL="0">
-              <a:buNone/>
-            </a:pPr>
-            <a:r>
-              <a:rPr lang="en-US" sz="950" dirty="0">
+            <a:pPr marL="0" indent="0">
+              <a:buNone/>
+            </a:pPr>
+            <a:r>
+              <a:rPr lang="en-US" sz="1050" dirty="0">
                 <a:solidFill>
                   <a:srgbClr val="5B6770"/>
                 </a:solidFill>
@@ -1914,14 +1768,14 @@
               </a:rPr>
               <a:t>Level 3</a:t>
             </a:r>
-            <a:endParaRPr lang="en-US" sz="950" dirty="0"/>
-          </a:p>
-          <a:p>
-            <a:pPr indent="0" marL="0">
-              <a:buNone/>
-            </a:pPr>
-            <a:r>
-              <a:rPr lang="en-US" sz="1200" b="1" dirty="0">
+            <a:endParaRPr lang="en-US" sz="1050" dirty="0"/>
+          </a:p>
+          <a:p>
+            <a:pPr marL="0" indent="0">
+              <a:buNone/>
+            </a:pPr>
+            <a:r>
+              <a:rPr lang="en-US" sz="1600" b="1" dirty="0">
                 <a:solidFill>
                   <a:srgbClr val="1F2933"/>
                 </a:solidFill>
@@ -1931,14 +1785,14 @@
               </a:rPr>
               <a:t>Organized dataset</a:t>
             </a:r>
-            <a:endParaRPr lang="en-US" sz="950" dirty="0"/>
-          </a:p>
-          <a:p>
-            <a:pPr indent="0" marL="0">
-              <a:buNone/>
-            </a:pPr>
-            <a:r>
-              <a:rPr lang="en-US" sz="900" dirty="0">
+            <a:endParaRPr lang="en-US" sz="1050" dirty="0"/>
+          </a:p>
+          <a:p>
+            <a:pPr marL="0" indent="0">
+              <a:buNone/>
+            </a:pPr>
+            <a:r>
+              <a:rPr lang="en-US" sz="1050" dirty="0">
                 <a:solidFill>
                   <a:srgbClr val="5B6770"/>
                 </a:solidFill>
@@ -1948,11 +1802,8 @@
               </a:rPr>
               <a:t>FAIR: </a:t>
             </a:r>
-            <a:pPr indent="0" marL="0">
-              <a:buNone/>
-            </a:pPr>
-            <a:r>
-              <a:rPr lang="en-US" sz="900" dirty="0">
+            <a:r>
+              <a:rPr lang="en-US" sz="1050" dirty="0">
                 <a:solidFill>
                   <a:srgbClr val="1F2933"/>
                 </a:solidFill>
@@ -1962,7 +1813,7 @@
               </a:rPr>
               <a:t>R1, R1.3, F2</a:t>
             </a:r>
-            <a:endParaRPr lang="en-US" sz="950" dirty="0"/>
+            <a:endParaRPr lang="en-US" sz="1050" dirty="0"/>
           </a:p>
         </p:txBody>
       </p:sp>
@@ -1992,6 +1843,13 @@
             <a:prstDash val="solid"/>
           </a:ln>
         </p:spPr>
+        <p:txBody>
+          <a:bodyPr/>
+          <a:lstStyle/>
+          <a:p>
+            <a:endParaRPr lang="en-US"/>
+          </a:p>
+        </p:txBody>
       </p:sp>
       <p:sp>
         <p:nvSpPr>
@@ -2017,6 +1875,13 @@
             <a:prstDash val="solid"/>
           </a:ln>
         </p:spPr>
+        <p:txBody>
+          <a:bodyPr/>
+          <a:lstStyle/>
+          <a:p>
+            <a:endParaRPr lang="en-US"/>
+          </a:p>
+        </p:txBody>
       </p:sp>
       <p:sp>
         <p:nvSpPr>
@@ -2042,6 +1907,13 @@
             <a:prstDash val="solid"/>
           </a:ln>
         </p:spPr>
+        <p:txBody>
+          <a:bodyPr/>
+          <a:lstStyle/>
+          <a:p>
+            <a:endParaRPr lang="en-US"/>
+          </a:p>
+        </p:txBody>
       </p:sp>
       <p:sp>
         <p:nvSpPr>
@@ -2064,7 +1936,7 @@
           <a:bodyPr wrap="square" lIns="0" tIns="0" rIns="0" bIns="0" rtlCol="0" anchor="ctr"/>
           <a:lstStyle/>
           <a:p>
-            <a:pPr algn="ctr" indent="0" marL="0">
+            <a:pPr marL="0" indent="0" algn="ctr">
               <a:buNone/>
             </a:pPr>
             <a:r>
@@ -2103,11 +1975,11 @@
           <a:bodyPr wrap="square" lIns="0" tIns="0" rIns="0" bIns="0" rtlCol="0" anchor="ctr"/>
           <a:lstStyle/>
           <a:p>
-            <a:pPr indent="0" marL="0">
-              <a:buNone/>
-            </a:pPr>
-            <a:r>
-              <a:rPr lang="en-US" sz="950" b="1" dirty="0">
+            <a:pPr marL="0" indent="0">
+              <a:buNone/>
+            </a:pPr>
+            <a:r>
+              <a:rPr lang="en-US" sz="1200" b="1" dirty="0">
                 <a:solidFill>
                   <a:srgbClr val="1F2933"/>
                 </a:solidFill>
@@ -2117,7 +1989,7 @@
               </a:rPr>
               <a:t>Ontologies &amp; terminologies</a:t>
             </a:r>
-            <a:endParaRPr lang="en-US" sz="950" dirty="0"/>
+            <a:endParaRPr lang="en-US" sz="1200" dirty="0"/>
           </a:p>
         </p:txBody>
       </p:sp>
@@ -2130,7 +2002,7 @@
         <p:spPr>
           <a:xfrm>
             <a:off x="8119872" y="3401568"/>
-            <a:ext cx="1618488" cy="329184"/>
+            <a:ext cx="1618488" cy="210312"/>
           </a:xfrm>
           <a:prstGeom prst="rect">
             <a:avLst/>
@@ -2142,11 +2014,11 @@
           <a:bodyPr wrap="square" lIns="0" tIns="0" rIns="0" bIns="0" rtlCol="0" anchor="t"/>
           <a:lstStyle/>
           <a:p>
-            <a:pPr indent="0" marL="0">
-              <a:buNone/>
-            </a:pPr>
-            <a:r>
-              <a:rPr lang="en-US" sz="900" i="1" dirty="0">
+            <a:pPr marL="0" indent="0">
+              <a:buNone/>
+            </a:pPr>
+            <a:r>
+              <a:rPr lang="en-US" sz="1050" i="1" dirty="0">
                 <a:solidFill>
                   <a:srgbClr val="5B6770"/>
                 </a:solidFill>
@@ -2156,7 +2028,7 @@
               </a:rPr>
               <a:t>+ NCBI Taxonomy, atlas, and HED terms</a:t>
             </a:r>
-            <a:endParaRPr lang="en-US" sz="900" dirty="0"/>
+            <a:endParaRPr lang="en-US" sz="1050" dirty="0"/>
           </a:p>
         </p:txBody>
       </p:sp>
@@ -2181,11 +2053,11 @@
           <a:bodyPr wrap="square" lIns="0" tIns="0" rIns="0" bIns="0" rtlCol="0" anchor="b"/>
           <a:lstStyle/>
           <a:p>
-            <a:pPr indent="0" marL="0">
-              <a:buNone/>
-            </a:pPr>
-            <a:r>
-              <a:rPr lang="en-US" sz="950" dirty="0">
+            <a:pPr marL="0" indent="0">
+              <a:buNone/>
+            </a:pPr>
+            <a:r>
+              <a:rPr lang="en-US" sz="1050" dirty="0">
                 <a:solidFill>
                   <a:srgbClr val="5B6770"/>
                 </a:solidFill>
@@ -2195,14 +2067,14 @@
               </a:rPr>
               <a:t>Level 4</a:t>
             </a:r>
-            <a:endParaRPr lang="en-US" sz="950" dirty="0"/>
-          </a:p>
-          <a:p>
-            <a:pPr indent="0" marL="0">
-              <a:buNone/>
-            </a:pPr>
-            <a:r>
-              <a:rPr lang="en-US" sz="1200" b="1" dirty="0">
+            <a:endParaRPr lang="en-US" sz="1050" dirty="0"/>
+          </a:p>
+          <a:p>
+            <a:pPr marL="0" indent="0">
+              <a:buNone/>
+            </a:pPr>
+            <a:r>
+              <a:rPr lang="en-US" sz="1600" b="1" dirty="0">
                 <a:solidFill>
                   <a:srgbClr val="1F2933"/>
                 </a:solidFill>
@@ -2212,14 +2084,14 @@
               </a:rPr>
               <a:t>Interoperable</a:t>
             </a:r>
-            <a:endParaRPr lang="en-US" sz="950" dirty="0"/>
-          </a:p>
-          <a:p>
-            <a:pPr indent="0" marL="0">
-              <a:buNone/>
-            </a:pPr>
-            <a:r>
-              <a:rPr lang="en-US" sz="900" dirty="0">
+            <a:endParaRPr lang="en-US" sz="1050" dirty="0"/>
+          </a:p>
+          <a:p>
+            <a:pPr marL="0" indent="0">
+              <a:buNone/>
+            </a:pPr>
+            <a:r>
+              <a:rPr lang="en-US" sz="1050" dirty="0">
                 <a:solidFill>
                   <a:srgbClr val="5B6770"/>
                 </a:solidFill>
@@ -2229,11 +2101,8 @@
               </a:rPr>
               <a:t>FAIR: </a:t>
             </a:r>
-            <a:pPr indent="0" marL="0">
-              <a:buNone/>
-            </a:pPr>
-            <a:r>
-              <a:rPr lang="en-US" sz="900" dirty="0">
+            <a:r>
+              <a:rPr lang="en-US" sz="1050" dirty="0">
                 <a:solidFill>
                   <a:srgbClr val="1F2933"/>
                 </a:solidFill>
@@ -2243,7 +2112,7 @@
               </a:rPr>
               <a:t>I2, I3</a:t>
             </a:r>
-            <a:endParaRPr lang="en-US" sz="950" dirty="0"/>
+            <a:endParaRPr lang="en-US" sz="1050" dirty="0"/>
           </a:p>
         </p:txBody>
       </p:sp>
@@ -2273,6 +2142,13 @@
             <a:prstDash val="solid"/>
           </a:ln>
         </p:spPr>
+        <p:txBody>
+          <a:bodyPr/>
+          <a:lstStyle/>
+          <a:p>
+            <a:endParaRPr lang="en-US"/>
+          </a:p>
+        </p:txBody>
       </p:sp>
       <p:sp>
         <p:nvSpPr>
@@ -2298,6 +2174,13 @@
             <a:prstDash val="solid"/>
           </a:ln>
         </p:spPr>
+        <p:txBody>
+          <a:bodyPr/>
+          <a:lstStyle/>
+          <a:p>
+            <a:endParaRPr lang="en-US"/>
+          </a:p>
+        </p:txBody>
       </p:sp>
       <p:sp>
         <p:nvSpPr>
@@ -2323,6 +2206,13 @@
             <a:prstDash val="solid"/>
           </a:ln>
         </p:spPr>
+        <p:txBody>
+          <a:bodyPr/>
+          <a:lstStyle/>
+          <a:p>
+            <a:endParaRPr lang="en-US"/>
+          </a:p>
+        </p:txBody>
       </p:sp>
       <p:sp>
         <p:nvSpPr>
@@ -2345,7 +2235,7 @@
           <a:bodyPr wrap="square" lIns="0" tIns="0" rIns="0" bIns="0" rtlCol="0" anchor="ctr"/>
           <a:lstStyle/>
           <a:p>
-            <a:pPr algn="ctr" indent="0" marL="0">
+            <a:pPr marL="0" indent="0" algn="ctr">
               <a:buNone/>
             </a:pPr>
             <a:r>
@@ -2384,11 +2274,11 @@
           <a:bodyPr wrap="square" lIns="0" tIns="0" rIns="0" bIns="0" rtlCol="0" anchor="ctr"/>
           <a:lstStyle/>
           <a:p>
-            <a:pPr indent="0" marL="0">
-              <a:buNone/>
-            </a:pPr>
-            <a:r>
-              <a:rPr lang="en-US" sz="950" b="1" dirty="0">
+            <a:pPr marL="0" indent="0">
+              <a:buNone/>
+            </a:pPr>
+            <a:r>
+              <a:rPr lang="en-US" sz="1200" b="1" dirty="0">
                 <a:solidFill>
                   <a:srgbClr val="1F2933"/>
                 </a:solidFill>
@@ -2398,7 +2288,7 @@
               </a:rPr>
               <a:t>Data archives</a:t>
             </a:r>
-            <a:endParaRPr lang="en-US" sz="950" dirty="0"/>
+            <a:endParaRPr lang="en-US" sz="1200" dirty="0"/>
           </a:p>
         </p:txBody>
       </p:sp>
@@ -2411,7 +2301,7 @@
         <p:spPr>
           <a:xfrm>
             <a:off x="10012680" y="2688336"/>
-            <a:ext cx="1618488" cy="329184"/>
+            <a:ext cx="1618488" cy="210312"/>
           </a:xfrm>
           <a:prstGeom prst="rect">
             <a:avLst/>
@@ -2423,11 +2313,11 @@
           <a:bodyPr wrap="square" lIns="0" tIns="0" rIns="0" bIns="0" rtlCol="0" anchor="t"/>
           <a:lstStyle/>
           <a:p>
-            <a:pPr indent="0" marL="0">
-              <a:buNone/>
-            </a:pPr>
-            <a:r>
-              <a:rPr lang="en-US" sz="900" i="1" dirty="0">
+            <a:pPr marL="0" indent="0">
+              <a:buNone/>
+            </a:pPr>
+            <a:r>
+              <a:rPr lang="en-US" sz="1050" i="1" dirty="0">
                 <a:solidFill>
                   <a:srgbClr val="5B6770"/>
                 </a:solidFill>
@@ -2435,9 +2325,9 @@
                 <a:ea typeface="Arial" pitchFamily="34" charset="-122"/>
                 <a:cs typeface="Arial" pitchFamily="34" charset="-120"/>
               </a:rPr>
-              <a:t>Dataset with a DOI on DANDI or EMBER</a:t>
-            </a:r>
-            <a:endParaRPr lang="en-US" sz="900" dirty="0"/>
+              <a:t>Dataset with a DOI and detailed metadata on EMBER</a:t>
+            </a:r>
+            <a:endParaRPr lang="en-US" sz="1050" dirty="0"/>
           </a:p>
         </p:txBody>
       </p:sp>
@@ -2449,8 +2339,8 @@
         </p:nvSpPr>
         <p:spPr>
           <a:xfrm>
-            <a:off x="9939528" y="1188720"/>
-            <a:ext cx="1764792" cy="841248"/>
+            <a:off x="9921240" y="1188720"/>
+            <a:ext cx="2002536" cy="841248"/>
           </a:xfrm>
           <a:prstGeom prst="rect">
             <a:avLst/>
@@ -2462,11 +2352,11 @@
           <a:bodyPr wrap="square" lIns="0" tIns="0" rIns="0" bIns="0" rtlCol="0" anchor="b"/>
           <a:lstStyle/>
           <a:p>
-            <a:pPr indent="0" marL="0">
-              <a:buNone/>
-            </a:pPr>
-            <a:r>
-              <a:rPr lang="en-US" sz="950" dirty="0">
+            <a:pPr marL="0" indent="0">
+              <a:buNone/>
+            </a:pPr>
+            <a:r>
+              <a:rPr lang="en-US" sz="1050" dirty="0">
                 <a:solidFill>
                   <a:srgbClr val="5B6770"/>
                 </a:solidFill>
@@ -2476,14 +2366,14 @@
               </a:rPr>
               <a:t>Level 5</a:t>
             </a:r>
-            <a:endParaRPr lang="en-US" sz="950" dirty="0"/>
-          </a:p>
-          <a:p>
-            <a:pPr indent="0" marL="0">
-              <a:buNone/>
-            </a:pPr>
-            <a:r>
-              <a:rPr lang="en-US" sz="1200" b="1" dirty="0">
+            <a:endParaRPr lang="en-US" sz="1050" dirty="0"/>
+          </a:p>
+          <a:p>
+            <a:pPr marL="0" indent="0">
+              <a:buNone/>
+            </a:pPr>
+            <a:r>
+              <a:rPr lang="en-US" sz="1600" b="1" dirty="0">
                 <a:solidFill>
                   <a:srgbClr val="1F2933"/>
                 </a:solidFill>
@@ -2493,14 +2383,14 @@
               </a:rPr>
               <a:t>Findable and reusable record</a:t>
             </a:r>
-            <a:endParaRPr lang="en-US" sz="950" dirty="0"/>
-          </a:p>
-          <a:p>
-            <a:pPr indent="0" marL="0">
-              <a:buNone/>
-            </a:pPr>
-            <a:r>
-              <a:rPr lang="en-US" sz="900" dirty="0">
+            <a:endParaRPr lang="en-US" sz="1050" dirty="0"/>
+          </a:p>
+          <a:p>
+            <a:pPr marL="0" indent="0">
+              <a:buNone/>
+            </a:pPr>
+            <a:r>
+              <a:rPr lang="en-US" sz="1050" dirty="0">
                 <a:solidFill>
                   <a:srgbClr val="5B6770"/>
                 </a:solidFill>
@@ -2510,11 +2400,8 @@
               </a:rPr>
               <a:t>FAIR: </a:t>
             </a:r>
-            <a:pPr indent="0" marL="0">
-              <a:buNone/>
-            </a:pPr>
-            <a:r>
-              <a:rPr lang="en-US" sz="900" dirty="0">
+            <a:r>
+              <a:rPr lang="en-US" sz="1050" dirty="0">
                 <a:solidFill>
                   <a:srgbClr val="1F2933"/>
                 </a:solidFill>
@@ -2524,7 +2411,7 @@
               </a:rPr>
               <a:t>F1–F4, A1–A2, R1.1, R1.2</a:t>
             </a:r>
-            <a:endParaRPr lang="en-US" sz="950" dirty="0"/>
+            <a:endParaRPr lang="en-US" sz="1050" dirty="0"/>
           </a:p>
         </p:txBody>
       </p:sp>
@@ -2554,6 +2441,13 @@
             <a:prstDash val="solid"/>
           </a:ln>
         </p:spPr>
+        <p:txBody>
+          <a:bodyPr/>
+          <a:lstStyle/>
+          <a:p>
+            <a:endParaRPr lang="en-US"/>
+          </a:p>
+        </p:txBody>
       </p:sp>
       <p:sp>
         <p:nvSpPr>
@@ -2579,6 +2473,13 @@
             <a:prstDash val="solid"/>
           </a:ln>
         </p:spPr>
+        <p:txBody>
+          <a:bodyPr/>
+          <a:lstStyle/>
+          <a:p>
+            <a:endParaRPr lang="en-US"/>
+          </a:p>
+        </p:txBody>
       </p:sp>
       <p:sp>
         <p:nvSpPr>
@@ -2601,7 +2502,7 @@
           <a:bodyPr wrap="square" lIns="0" tIns="0" rIns="0" bIns="0" rtlCol="0" anchor="ctr"/>
           <a:lstStyle/>
           <a:p>
-            <a:pPr algn="ctr" indent="0" marL="0">
+            <a:pPr marL="0" indent="0" algn="ctr">
               <a:buNone/>
             </a:pPr>
             <a:r>
@@ -2627,7 +2528,7 @@
         </p:nvSpPr>
         <p:spPr>
           <a:xfrm>
-            <a:off x="4718304" y="5806440"/>
+            <a:off x="4764024" y="5806440"/>
             <a:ext cx="3072384" cy="347472"/>
           </a:xfrm>
           <a:prstGeom prst="rect">
@@ -2640,11 +2541,11 @@
           <a:bodyPr wrap="square" lIns="0" tIns="0" rIns="0" bIns="0" rtlCol="0" anchor="ctr"/>
           <a:lstStyle/>
           <a:p>
-            <a:pPr indent="0" marL="0">
-              <a:buNone/>
-            </a:pPr>
-            <a:r>
-              <a:rPr lang="en-US" sz="950" b="1" dirty="0">
+            <a:pPr marL="0" indent="0">
+              <a:buNone/>
+            </a:pPr>
+            <a:r>
+              <a:rPr lang="en-US" sz="1200" b="1" dirty="0">
                 <a:solidFill>
                   <a:srgbClr val="1F2933"/>
                 </a:solidFill>
@@ -2654,7 +2555,7 @@
               </a:rPr>
               <a:t>Schema languages: levels 2 and 3 machine-checkable</a:t>
             </a:r>
-            <a:endParaRPr lang="en-US" sz="950" dirty="0"/>
+            <a:endParaRPr lang="en-US" sz="1200" dirty="0"/>
           </a:p>
         </p:txBody>
       </p:sp>
@@ -2666,8 +2567,8 @@
         </p:nvSpPr>
         <p:spPr>
           <a:xfrm flipV="1">
-            <a:off x="822960" y="758952"/>
-            <a:ext cx="9262872" cy="3355848"/>
+            <a:off x="1189190" y="749808"/>
+            <a:ext cx="9061234" cy="3429000"/>
           </a:xfrm>
           <a:prstGeom prst="line">
             <a:avLst/>
@@ -2675,173 +2576,172 @@
           <a:noFill/>
           <a:ln w="38100">
             <a:solidFill>
-              <a:srgbClr val="9AA5B1"/>
+              <a:schemeClr val="tx2"/>
             </a:solidFill>
             <a:prstDash val="solid"/>
-            <a:tailEnd type="triangle"/>
+            <a:tailEnd type="triangle" w="lg" len="lg"/>
           </a:ln>
         </p:spPr>
-      </p:sp>
-      <p:sp>
-        <p:nvSpPr>
-          <p:cNvPr id="47" name="Flag pole"/>
-          <p:cNvSpPr/>
-          <p:nvPr/>
-        </p:nvSpPr>
-        <p:spPr>
-          <a:xfrm>
-            <a:off x="10195560" y="301752"/>
-            <a:ext cx="0" cy="502920"/>
-          </a:xfrm>
-          <a:prstGeom prst="line">
+        <p:txBody>
+          <a:bodyPr/>
+          <a:lstStyle/>
+          <a:p>
+            <a:endParaRPr lang="en-US"/>
+          </a:p>
+        </p:txBody>
+      </p:sp>
+      <p:pic>
+        <p:nvPicPr>
+          <p:cNvPr id="53" name="Graphic 52" descr="Flag with solid fill">
+            <a:extLst>
+              <a:ext uri="{FF2B5EF4-FFF2-40B4-BE49-F238E27FC236}">
+                <a16:creationId xmlns:a16="http://schemas.microsoft.com/office/drawing/2014/main" id="{244B8326-F86B-04DE-2F29-AD1E4E46A837}"/>
+              </a:ext>
+            </a:extLst>
+          </p:cNvPr>
+          <p:cNvPicPr>
+            <a:picLocks noChangeAspect="1"/>
+          </p:cNvPicPr>
+          <p:nvPr/>
+        </p:nvPicPr>
+        <p:blipFill>
+          <a:blip>
+            <a:extLst>
+              <a:ext uri="{96DAC541-7B7A-43D3-8B79-37D633B846F1}">
+                <asvg:svgBlip xmlns:asvg="http://schemas.microsoft.com/office/drawing/2016/SVG/main" r:embed="rId3"/>
+              </a:ext>
+            </a:extLst>
+          </a:blip>
+          <a:srcRect b="23584"/>
+          <a:stretch>
+            <a:fillRect/>
+          </a:stretch>
+        </p:blipFill>
+        <p:spPr>
+          <a:xfrm>
+            <a:off x="10281372" y="350157"/>
+            <a:ext cx="981385" cy="749937"/>
+          </a:xfrm>
+          <a:prstGeom prst="rect">
+            <a:avLst/>
+          </a:prstGeom>
+        </p:spPr>
+      </p:pic>
+      <p:sp>
+        <p:nvSpPr>
+          <p:cNvPr id="54" name="TextBox 53">
+            <a:extLst>
+              <a:ext uri="{FF2B5EF4-FFF2-40B4-BE49-F238E27FC236}">
+                <a16:creationId xmlns:a16="http://schemas.microsoft.com/office/drawing/2014/main" id="{1586CD98-5D00-AD6D-7DC9-2FD4DC99641D}"/>
+              </a:ext>
+            </a:extLst>
+          </p:cNvPr>
+          <p:cNvSpPr txBox="1"/>
+          <p:nvPr/>
+        </p:nvSpPr>
+        <p:spPr>
+          <a:xfrm>
+            <a:off x="10618176" y="488462"/>
+            <a:ext cx="415926" cy="254000"/>
+          </a:xfrm>
+          <a:prstGeom prst="rect">
             <a:avLst/>
           </a:prstGeom>
           <a:noFill/>
-          <a:ln w="19050">
-            <a:solidFill>
-              <a:srgbClr val="1F2933"/>
-            </a:solidFill>
-            <a:prstDash val="solid"/>
-          </a:ln>
-        </p:spPr>
-      </p:sp>
-      <p:sp>
-        <p:nvSpPr>
-          <p:cNvPr id="48" name="Flag"/>
-          <p:cNvSpPr/>
-          <p:nvPr/>
-        </p:nvSpPr>
-        <p:spPr>
-          <a:xfrm rot="5400000">
-            <a:off x="10213848" y="320040"/>
-            <a:ext cx="274320" cy="219456"/>
-          </a:xfrm>
-          <a:prstGeom prst="triangle">
-            <a:avLst/>
-          </a:prstGeom>
-          <a:solidFill>
-            <a:srgbClr val="0072B2"/>
-          </a:solidFill>
-          <a:ln w="12700">
-            <a:solidFill>
-              <a:srgbClr val="0072B2"/>
-            </a:solidFill>
-            <a:prstDash val="solid"/>
-          </a:ln>
-        </p:spPr>
-      </p:sp>
-      <p:sp>
-        <p:nvSpPr>
-          <p:cNvPr id="49" name="Climbing label"/>
-          <p:cNvSpPr txBox="1"/>
-          <p:nvPr/>
-        </p:nvSpPr>
-        <p:spPr>
-          <a:xfrm>
-            <a:off x="457200" y="914400"/>
-            <a:ext cx="2926080" cy="685800"/>
-          </a:xfrm>
-          <a:prstGeom prst="rect">
-            <a:avLst/>
-          </a:prstGeom>
-          <a:noFill/>
-          <a:ln/>
-        </p:spPr>
-        <p:txBody>
-          <a:bodyPr wrap="square" lIns="0" tIns="0" rIns="0" bIns="0" rtlCol="0" anchor="t"/>
-          <a:lstStyle/>
-          <a:p>
-            <a:pPr indent="0" marL="0">
-              <a:buNone/>
-            </a:pPr>
-            <a:r>
-              <a:rPr lang="en-US" sz="1150" b="1" i="1" dirty="0">
-                <a:solidFill>
-                  <a:srgbClr val="1F2933"/>
-                </a:solidFill>
-                <a:latin typeface="Arial" pitchFamily="34" charset="0"/>
-                <a:ea typeface="Arial" pitchFamily="34" charset="-122"/>
-                <a:cs typeface="Arial" pitchFamily="34" charset="-120"/>
-              </a:rPr>
-              <a:t>Climbing the levels:</a:t>
-            </a:r>
-            <a:endParaRPr lang="en-US" sz="1150" dirty="0"/>
-          </a:p>
-          <a:p>
-            <a:pPr indent="0" marL="0">
-              <a:buNone/>
-            </a:pPr>
-            <a:r>
-              <a:rPr lang="en-US" sz="1150" i="1" dirty="0">
-                <a:solidFill>
-                  <a:srgbClr val="5B6770"/>
-                </a:solidFill>
-                <a:latin typeface="Arial" pitchFamily="34" charset="0"/>
-                <a:ea typeface="Arial" pitchFamily="34" charset="-122"/>
-                <a:cs typeface="Arial" pitchFamily="34" charset="-120"/>
-              </a:rPr>
-              <a:t>data become easier to find,</a:t>
-            </a:r>
-            <a:endParaRPr lang="en-US" sz="1150" dirty="0"/>
-          </a:p>
-          <a:p>
-            <a:pPr indent="0" marL="0">
-              <a:buNone/>
-            </a:pPr>
-            <a:r>
-              <a:rPr lang="en-US" sz="1150" i="1" dirty="0">
-                <a:solidFill>
-                  <a:srgbClr val="5B6770"/>
-                </a:solidFill>
-                <a:latin typeface="Arial" pitchFamily="34" charset="0"/>
-                <a:ea typeface="Arial" pitchFamily="34" charset="-122"/>
-                <a:cs typeface="Arial" pitchFamily="34" charset="-120"/>
-              </a:rPr>
-              <a:t>understand, combine, and reuse</a:t>
-            </a:r>
-            <a:endParaRPr lang="en-US" sz="1150" dirty="0"/>
-          </a:p>
-        </p:txBody>
-      </p:sp>
-      <p:sp>
-        <p:nvSpPr>
-          <p:cNvPr id="50" name="Text 48"/>
-          <p:cNvSpPr txBox="1"/>
-          <p:nvPr/>
-        </p:nvSpPr>
-        <p:spPr>
-          <a:xfrm>
-            <a:off x="457200" y="6382512"/>
-            <a:ext cx="11274552" cy="365760"/>
-          </a:xfrm>
-          <a:prstGeom prst="rect">
-            <a:avLst/>
-          </a:prstGeom>
-          <a:noFill/>
-          <a:ln/>
-        </p:spPr>
-        <p:txBody>
-          <a:bodyPr wrap="square" lIns="0" tIns="0" rIns="0" bIns="0" rtlCol="0" anchor="t"/>
-          <a:lstStyle/>
-          <a:p>
-            <a:pPr indent="0" marL="0">
-              <a:buNone/>
-            </a:pPr>
-            <a:r>
-              <a:rPr lang="en-US" sz="900" dirty="0">
-                <a:solidFill>
-                  <a:srgbClr val="5B6770"/>
-                </a:solidFill>
-                <a:latin typeface="Arial" pitchFamily="34" charset="0"/>
-                <a:ea typeface="Arial" pitchFamily="34" charset="-122"/>
-                <a:cs typeface="Arial" pitchFamily="34" charset="-120"/>
-              </a:rPr>
-              <a:t>Numbers 1–6 are the layers of Fig. 1 and Table 1. FAIR = FAIR principles mainly addressed (full text in the speaker notes).</a:t>
-            </a:r>
-            <a:endParaRPr lang="en-US" sz="900" dirty="0"/>
-          </a:p>
-        </p:txBody>
-      </p:sp>
+        </p:spPr>
+        <p:txBody>
+          <a:bodyPr wrap="none" rtlCol="0">
+            <a:prstTxWarp prst="textWave1">
+              <a:avLst/>
+            </a:prstTxWarp>
+            <a:spAutoFit/>
+          </a:bodyPr>
+          <a:lstStyle/>
+          <a:p>
+            <a:r>
+              <a:rPr lang="en-US" sz="1050" dirty="0">
+                <a:solidFill>
+                  <a:schemeClr val="bg1"/>
+                </a:solidFill>
+              </a:rPr>
+              <a:t>FAIR</a:t>
+            </a:r>
+          </a:p>
+        </p:txBody>
+      </p:sp>
+      <p:pic>
+        <p:nvPicPr>
+          <p:cNvPr id="56" name="Graphic 55" descr="Lock with solid fill">
+            <a:extLst>
+              <a:ext uri="{FF2B5EF4-FFF2-40B4-BE49-F238E27FC236}">
+                <a16:creationId xmlns:a16="http://schemas.microsoft.com/office/drawing/2014/main" id="{621258FB-CC87-E563-0E26-70CA9490CC3F}"/>
+              </a:ext>
+            </a:extLst>
+          </p:cNvPr>
+          <p:cNvPicPr>
+            <a:picLocks noChangeAspect="1"/>
+          </p:cNvPicPr>
+          <p:nvPr/>
+        </p:nvPicPr>
+        <p:blipFill>
+          <a:blip>
+            <a:extLst>
+              <a:ext uri="{96DAC541-7B7A-43D3-8B79-37D633B846F1}">
+                <asvg:svgBlip xmlns:asvg="http://schemas.microsoft.com/office/drawing/2016/SVG/main" r:embed="rId4"/>
+              </a:ext>
+            </a:extLst>
+          </a:blip>
+          <a:stretch>
+            <a:fillRect/>
+          </a:stretch>
+        </p:blipFill>
+        <p:spPr>
+          <a:xfrm>
+            <a:off x="481850" y="4006901"/>
+            <a:ext cx="543217" cy="543217"/>
+          </a:xfrm>
+          <a:prstGeom prst="rect">
+            <a:avLst/>
+          </a:prstGeom>
+        </p:spPr>
+      </p:pic>
+      <p:pic>
+        <p:nvPicPr>
+          <p:cNvPr id="58" name="Graphic 57" descr="Paper outline">
+            <a:extLst>
+              <a:ext uri="{FF2B5EF4-FFF2-40B4-BE49-F238E27FC236}">
+                <a16:creationId xmlns:a16="http://schemas.microsoft.com/office/drawing/2014/main" id="{679330AB-F249-C596-4DF7-4FA885D1E559}"/>
+              </a:ext>
+            </a:extLst>
+          </p:cNvPr>
+          <p:cNvPicPr>
+            <a:picLocks noChangeAspect="1"/>
+          </p:cNvPicPr>
+          <p:nvPr/>
+        </p:nvPicPr>
+        <p:blipFill>
+          <a:blip>
+            <a:extLst>
+              <a:ext uri="{96DAC541-7B7A-43D3-8B79-37D633B846F1}">
+                <asvg:svgBlip xmlns:asvg="http://schemas.microsoft.com/office/drawing/2016/SVG/main" r:embed="rId5"/>
+              </a:ext>
+            </a:extLst>
+          </a:blip>
+          <a:srcRect l="12987"/>
+          <a:stretch>
+            <a:fillRect/>
+          </a:stretch>
+        </p:blipFill>
+        <p:spPr>
+          <a:xfrm>
+            <a:off x="457200" y="3759355"/>
+            <a:ext cx="731989" cy="841249"/>
+          </a:xfrm>
+          <a:prstGeom prst="rect">
+            <a:avLst/>
+          </a:prstGeom>
+        </p:spPr>
+      </p:pic>
     </p:spTree>
   </p:cSld>
   <p:clrMapOvr>
@@ -3143,4 +3043,319 @@
     </a:ext>
   </a:extLst>
 </a:theme>
+</file>
+
+<file path=ppt/theme/theme2.xml><?xml version="1.0" encoding="utf-8"?>
+<a:theme xmlns:a="http://schemas.openxmlformats.org/drawingml/2006/main" name="Office Theme">
+  <a:themeElements>
+    <a:clrScheme name="Office">
+      <a:dk1>
+        <a:sysClr val="windowText" lastClr="000000"/>
+      </a:dk1>
+      <a:lt1>
+        <a:sysClr val="window" lastClr="FFFFFF"/>
+      </a:lt1>
+      <a:dk2>
+        <a:srgbClr val="0E2841"/>
+      </a:dk2>
+      <a:lt2>
+        <a:srgbClr val="E8E8E8"/>
+      </a:lt2>
+      <a:accent1>
+        <a:srgbClr val="156082"/>
+      </a:accent1>
+      <a:accent2>
+        <a:srgbClr val="E97132"/>
+      </a:accent2>
+      <a:accent3>
+        <a:srgbClr val="196B24"/>
+      </a:accent3>
+      <a:accent4>
+        <a:srgbClr val="0F9ED5"/>
+      </a:accent4>
+      <a:accent5>
+        <a:srgbClr val="A02B93"/>
+      </a:accent5>
+      <a:accent6>
+        <a:srgbClr val="4EA72E"/>
+      </a:accent6>
+      <a:hlink>
+        <a:srgbClr val="467886"/>
+      </a:hlink>
+      <a:folHlink>
+        <a:srgbClr val="96607D"/>
+      </a:folHlink>
+    </a:clrScheme>
+    <a:fontScheme name="Office">
+      <a:majorFont>
+        <a:latin typeface="Aptos Display" panose="02110004020202020204"/>
+        <a:ea typeface=""/>
+        <a:cs typeface=""/>
+        <a:font script="Jpan" typeface="游ゴシック Light"/>
+        <a:font script="Hang" typeface="맑은 고딕"/>
+        <a:font script="Hans" typeface="等线 Light"/>
+        <a:font script="Hant" typeface="新細明體"/>
+        <a:font script="Arab" typeface="Times New Roman"/>
+        <a:font script="Hebr" typeface="Times New Roman"/>
+        <a:font script="Thai" typeface="Angsana New"/>
+        <a:font script="Ethi" typeface="Nyala"/>
+        <a:font script="Beng" typeface="Vrinda"/>
+        <a:font script="Gujr" typeface="Shruti"/>
+        <a:font script="Khmr" typeface="MoolBoran"/>
+        <a:font script="Knda" typeface="Tunga"/>
+        <a:font script="Guru" typeface="Raavi"/>
+        <a:font script="Cans" typeface="Euphemia"/>
+        <a:font script="Cher" typeface="Plantagenet Cherokee"/>
+        <a:font script="Yiii" typeface="Microsoft Yi Baiti"/>
+        <a:font script="Tibt" typeface="Microsoft Himalaya"/>
+        <a:font script="Thaa" typeface="MV Boli"/>
+        <a:font script="Deva" typeface="Mangal"/>
+        <a:font script="Telu" typeface="Gautami"/>
+        <a:font script="Taml" typeface="Latha"/>
+        <a:font script="Syrc" typeface="Estrangelo Edessa"/>
+        <a:font script="Orya" typeface="Kalinga"/>
+        <a:font script="Mlym" typeface="Kartika"/>
+        <a:font script="Laoo" typeface="DokChampa"/>
+        <a:font script="Sinh" typeface="Iskoola Pota"/>
+        <a:font script="Mong" typeface="Mongolian Baiti"/>
+        <a:font script="Viet" typeface="Times New Roman"/>
+        <a:font script="Uigh" typeface="Microsoft Uighur"/>
+        <a:font script="Geor" typeface="Sylfaen"/>
+        <a:font script="Armn" typeface="Arial"/>
+        <a:font script="Bugi" typeface="Leelawadee UI"/>
+        <a:font script="Bopo" typeface="Microsoft JhengHei"/>
+        <a:font script="Java" typeface="Javanese Text"/>
+        <a:font script="Lisu" typeface="Segoe UI"/>
+        <a:font script="Mymr" typeface="Myanmar Text"/>
+        <a:font script="Nkoo" typeface="Ebrima"/>
+        <a:font script="Olck" typeface="Nirmala UI"/>
+        <a:font script="Osma" typeface="Ebrima"/>
+        <a:font script="Phag" typeface="Phagspa"/>
+        <a:font script="Syrn" typeface="Estrangelo Edessa"/>
+        <a:font script="Syrj" typeface="Estrangelo Edessa"/>
+        <a:font script="Syre" typeface="Estrangelo Edessa"/>
+        <a:font script="Sora" typeface="Nirmala UI"/>
+        <a:font script="Tale" typeface="Microsoft Tai Le"/>
+        <a:font script="Talu" typeface="Microsoft New Tai Lue"/>
+        <a:font script="Tfng" typeface="Ebrima"/>
+      </a:majorFont>
+      <a:minorFont>
+        <a:latin typeface="Aptos" panose="02110004020202020204"/>
+        <a:ea typeface=""/>
+        <a:cs typeface=""/>
+        <a:font script="Jpan" typeface="游ゴシック"/>
+        <a:font script="Hang" typeface="맑은 고딕"/>
+        <a:font script="Hans" typeface="等线"/>
+        <a:font script="Hant" typeface="新細明體"/>
+        <a:font script="Arab" typeface="Arial"/>
+        <a:font script="Hebr" typeface="Arial"/>
+        <a:font script="Thai" typeface="Cordia New"/>
+        <a:font script="Ethi" typeface="Nyala"/>
+        <a:font script="Beng" typeface="Vrinda"/>
+        <a:font script="Gujr" typeface="Shruti"/>
+        <a:font script="Khmr" typeface="DaunPenh"/>
+        <a:font script="Knda" typeface="Tunga"/>
+        <a:font script="Guru" typeface="Raavi"/>
+        <a:font script="Cans" typeface="Euphemia"/>
+        <a:font script="Cher" typeface="Plantagenet Cherokee"/>
+        <a:font script="Yiii" typeface="Microsoft Yi Baiti"/>
+        <a:font script="Tibt" typeface="Microsoft Himalaya"/>
+        <a:font script="Thaa" typeface="MV Boli"/>
+        <a:font script="Deva" typeface="Mangal"/>
+        <a:font script="Telu" typeface="Gautami"/>
+        <a:font script="Taml" typeface="Latha"/>
+        <a:font script="Syrc" typeface="Estrangelo Edessa"/>
+        <a:font script="Orya" typeface="Kalinga"/>
+        <a:font script="Mlym" typeface="Kartika"/>
+        <a:font script="Laoo" typeface="DokChampa"/>
+        <a:font script="Sinh" typeface="Iskoola Pota"/>
+        <a:font script="Mong" typeface="Mongolian Baiti"/>
+        <a:font script="Viet" typeface="Arial"/>
+        <a:font script="Uigh" typeface="Microsoft Uighur"/>
+        <a:font script="Geor" typeface="Sylfaen"/>
+        <a:font script="Armn" typeface="Arial"/>
+        <a:font script="Bugi" typeface="Leelawadee UI"/>
+        <a:font script="Bopo" typeface="Microsoft JhengHei"/>
+        <a:font script="Java" typeface="Javanese Text"/>
+        <a:font script="Lisu" typeface="Segoe UI"/>
+        <a:font script="Mymr" typeface="Myanmar Text"/>
+        <a:font script="Nkoo" typeface="Ebrima"/>
+        <a:font script="Olck" typeface="Nirmala UI"/>
+        <a:font script="Osma" typeface="Ebrima"/>
+        <a:font script="Phag" typeface="Phagspa"/>
+        <a:font script="Syrn" typeface="Estrangelo Edessa"/>
+        <a:font script="Syrj" typeface="Estrangelo Edessa"/>
+        <a:font script="Syre" typeface="Estrangelo Edessa"/>
+        <a:font script="Sora" typeface="Nirmala UI"/>
+        <a:font script="Tale" typeface="Microsoft Tai Le"/>
+        <a:font script="Talu" typeface="Microsoft New Tai Lue"/>
+        <a:font script="Tfng" typeface="Ebrima"/>
+      </a:minorFont>
+    </a:fontScheme>
+    <a:fmtScheme name="Office">
+      <a:fillStyleLst>
+        <a:solidFill>
+          <a:schemeClr val="phClr"/>
+        </a:solidFill>
+        <a:gradFill rotWithShape="1">
+          <a:gsLst>
+            <a:gs pos="0">
+              <a:schemeClr val="phClr">
+                <a:lumMod val="110000"/>
+                <a:satMod val="105000"/>
+                <a:tint val="67000"/>
+              </a:schemeClr>
+            </a:gs>
+            <a:gs pos="50000">
+              <a:schemeClr val="phClr">
+                <a:lumMod val="105000"/>
+                <a:satMod val="103000"/>
+                <a:tint val="73000"/>
+              </a:schemeClr>
+            </a:gs>
+            <a:gs pos="100000">
+              <a:schemeClr val="phClr">
+                <a:lumMod val="105000"/>
+                <a:satMod val="109000"/>
+                <a:tint val="81000"/>
+              </a:schemeClr>
+            </a:gs>
+          </a:gsLst>
+          <a:lin ang="5400000" scaled="0"/>
+        </a:gradFill>
+        <a:gradFill rotWithShape="1">
+          <a:gsLst>
+            <a:gs pos="0">
+              <a:schemeClr val="phClr">
+                <a:satMod val="103000"/>
+                <a:lumMod val="102000"/>
+                <a:tint val="94000"/>
+              </a:schemeClr>
+            </a:gs>
+            <a:gs pos="50000">
+              <a:schemeClr val="phClr">
+                <a:satMod val="110000"/>
+                <a:lumMod val="100000"/>
+                <a:shade val="100000"/>
+              </a:schemeClr>
+            </a:gs>
+            <a:gs pos="100000">
+              <a:schemeClr val="phClr">
+                <a:lumMod val="99000"/>
+                <a:satMod val="120000"/>
+                <a:shade val="78000"/>
+              </a:schemeClr>
+            </a:gs>
+          </a:gsLst>
+          <a:lin ang="5400000" scaled="0"/>
+        </a:gradFill>
+      </a:fillStyleLst>
+      <a:lnStyleLst>
+        <a:ln w="12700" cap="flat" cmpd="sng" algn="ctr">
+          <a:solidFill>
+            <a:schemeClr val="phClr"/>
+          </a:solidFill>
+          <a:prstDash val="solid"/>
+          <a:miter lim="800000"/>
+        </a:ln>
+        <a:ln w="19050" cap="flat" cmpd="sng" algn="ctr">
+          <a:solidFill>
+            <a:schemeClr val="phClr"/>
+          </a:solidFill>
+          <a:prstDash val="solid"/>
+          <a:miter lim="800000"/>
+        </a:ln>
+        <a:ln w="25400" cap="flat" cmpd="sng" algn="ctr">
+          <a:solidFill>
+            <a:schemeClr val="phClr"/>
+          </a:solidFill>
+          <a:prstDash val="solid"/>
+          <a:miter lim="800000"/>
+        </a:ln>
+      </a:lnStyleLst>
+      <a:effectStyleLst>
+        <a:effectStyle>
+          <a:effectLst/>
+        </a:effectStyle>
+        <a:effectStyle>
+          <a:effectLst/>
+        </a:effectStyle>
+        <a:effectStyle>
+          <a:effectLst>
+            <a:outerShdw blurRad="57150" dist="19050" dir="5400000" algn="ctr" rotWithShape="0">
+              <a:srgbClr val="000000">
+                <a:alpha val="63000"/>
+              </a:srgbClr>
+            </a:outerShdw>
+          </a:effectLst>
+        </a:effectStyle>
+      </a:effectStyleLst>
+      <a:bgFillStyleLst>
+        <a:solidFill>
+          <a:schemeClr val="phClr"/>
+        </a:solidFill>
+        <a:solidFill>
+          <a:schemeClr val="phClr">
+            <a:tint val="95000"/>
+            <a:satMod val="170000"/>
+          </a:schemeClr>
+        </a:solidFill>
+        <a:gradFill rotWithShape="1">
+          <a:gsLst>
+            <a:gs pos="0">
+              <a:schemeClr val="phClr">
+                <a:tint val="93000"/>
+                <a:satMod val="150000"/>
+                <a:shade val="98000"/>
+                <a:lumMod val="102000"/>
+              </a:schemeClr>
+            </a:gs>
+            <a:gs pos="50000">
+              <a:schemeClr val="phClr">
+                <a:tint val="98000"/>
+                <a:satMod val="130000"/>
+                <a:shade val="90000"/>
+                <a:lumMod val="103000"/>
+              </a:schemeClr>
+            </a:gs>
+            <a:gs pos="100000">
+              <a:schemeClr val="phClr">
+                <a:shade val="63000"/>
+                <a:satMod val="120000"/>
+              </a:schemeClr>
+            </a:gs>
+          </a:gsLst>
+          <a:lin ang="5400000" scaled="0"/>
+        </a:gradFill>
+      </a:bgFillStyleLst>
+    </a:fmtScheme>
+  </a:themeElements>
+  <a:objectDefaults>
+    <a:lnDef>
+      <a:spPr/>
+      <a:bodyPr/>
+      <a:lstStyle/>
+      <a:style>
+        <a:lnRef idx="2">
+          <a:schemeClr val="accent1"/>
+        </a:lnRef>
+        <a:fillRef idx="0">
+          <a:schemeClr val="accent1"/>
+        </a:fillRef>
+        <a:effectRef idx="1">
+          <a:schemeClr val="accent1"/>
+        </a:effectRef>
+        <a:fontRef idx="minor">
+          <a:schemeClr val="tx1"/>
+        </a:fontRef>
+      </a:style>
+    </a:lnDef>
+  </a:objectDefaults>
+  <a:extraClrSchemeLst/>
+  <a:extLst>
+    <a:ext uri="{05A4C25C-085E-4340-85A3-A5531E510DB2}">
+      <thm15:themeFamily xmlns:thm15="http://schemas.microsoft.com/office/thememl/2012/main" name="Office Theme" id="{2E142A2C-CD16-42D6-873A-C26D2A0506FA}" vid="{1BDDFF52-6CD6-40A5-AB3C-68EB2F1E4D0A}"/>
+    </a:ext>
+  </a:extLst>
+</a:theme>
 </file>
--- a/figures/fig2_fair_levels/fig2_fair_levels_design.pptx
+++ b/figures/fig2_fair_levels/fig2_fair_levels_design.pptx
@@ -287,14 +287,14 @@
 FAIR PRINCIPLES PER LEVEL (Wilkinson et al. 2016, Sci Data 3:160018). The mapping to the RDA FAIR Data Maturity Model indicators is in Suppl. Table S2 only.
 LEVEL 0, OPAQUE (NO STANDARD)
 FAIR principles: none
-LEVEL 1, READABLE (5 DATA FORMATS)
+LEVEL 1, READABLE (1 DATA FORMATS)
 FAIR principles:
   I1: (Meta)data use a formal, accessible, shared, and broadly applicable language for knowledge representation.
-LEVEL 2, INTERPRETABLE FILES (3 FILE ORGANIZATION STANDARDS)
+LEVEL 2, INTERPRETABLE FILES (2 FILE ORGANIZATION STANDARDS)
 FAIR principles:
   R1: (Meta)data are richly described with a plurality of accurate and relevant attributes.
   R1.3: (Meta)data meet domain-relevant community standards.
-LEVEL 3, ORGANIZED DATASET (2 DATASET ORGANIZATION STANDARDS)
+LEVEL 3, ORGANIZED DATASET (3 DATASET ORGANIZATION STANDARDS)
 FAIR principles:
   R1: (Meta)data are richly described with a plurality of accurate and relevant attributes.
   R1.3: (Meta)data meet domain-relevant community standards.
@@ -303,7 +303,7 @@
 FAIR principles:
   I2: (Meta)data use vocabularies that follow FAIR principles.
   I3: (Meta)data include qualified references to other (meta)data.
-LEVEL 5, FINDABLE AND REUSABLE RECORD (1 DATA ARCHIVES)
+LEVEL 5, FINDABLE AND REUSABLE RECORD (5 DATA ARCHIVES)
 FAIR principles:
   F1: (Meta)data are assigned a globally unique and persistent identifier.
   F2: Data are described with rich metadata (defined by R1).
@@ -988,7 +988,7 @@
       </p:sp>
       <p:sp>
         <p:nvSpPr>
-          <p:cNvPr id="9" name="Badge 5"/>
+          <p:cNvPr id="9" name="Badge 1"/>
           <p:cNvSpPr/>
           <p:nvPr/>
         </p:nvSpPr>
@@ -1051,7 +1051,7 @@
                 <a:ea typeface="Arial" pitchFamily="34" charset="-122"/>
                 <a:cs typeface="Arial" pitchFamily="34" charset="-120"/>
               </a:rPr>
-              <a:t>5</a:t>
+              <a:t>1</a:t>
             </a:r>
             <a:endParaRPr lang="en-US" sz="1150" dirty="0"/>
           </a:p>
@@ -1287,7 +1287,7 @@
       </p:sp>
       <p:sp>
         <p:nvSpPr>
-          <p:cNvPr id="16" name="Badge 3"/>
+          <p:cNvPr id="16" name="Badge 2"/>
           <p:cNvSpPr/>
           <p:nvPr/>
         </p:nvSpPr>
@@ -1350,7 +1350,7 @@
                 <a:ea typeface="Arial" pitchFamily="34" charset="-122"/>
                 <a:cs typeface="Arial" pitchFamily="34" charset="-120"/>
               </a:rPr>
-              <a:t>3</a:t>
+              <a:t>2</a:t>
             </a:r>
             <a:endParaRPr lang="en-US" sz="1150" dirty="0"/>
           </a:p>
@@ -1586,7 +1586,7 @@
       </p:sp>
       <p:sp>
         <p:nvSpPr>
-          <p:cNvPr id="23" name="Badge 2"/>
+          <p:cNvPr id="23" name="Badge 3"/>
           <p:cNvSpPr/>
           <p:nvPr/>
         </p:nvSpPr>
@@ -1649,7 +1649,7 @@
                 <a:ea typeface="Arial" pitchFamily="34" charset="-122"/>
                 <a:cs typeface="Arial" pitchFamily="34" charset="-120"/>
               </a:rPr>
-              <a:t>2</a:t>
+              <a:t>3</a:t>
             </a:r>
             <a:endParaRPr lang="en-US" sz="1150" dirty="0"/>
           </a:p>
@@ -2184,7 +2184,7 @@
       </p:sp>
       <p:sp>
         <p:nvSpPr>
-          <p:cNvPr id="37" name="Badge 1"/>
+          <p:cNvPr id="37" name="Badge 5"/>
           <p:cNvSpPr/>
           <p:nvPr/>
         </p:nvSpPr>
@@ -2247,7 +2247,7 @@
                 <a:ea typeface="Arial" pitchFamily="34" charset="-122"/>
                 <a:cs typeface="Arial" pitchFamily="34" charset="-120"/>
               </a:rPr>
-              <a:t>1</a:t>
+              <a:t>5</a:t>
             </a:r>
             <a:endParaRPr lang="en-US" sz="1150" dirty="0"/>
           </a:p>

--- a/figures/fig2_fair_levels/fig2_fair_levels_design.pptx
+++ b/figures/fig2_fair_levels/fig2_fair_levels_design.pptx
@@ -2553,7 +2553,18 @@
                 <a:ea typeface="Arial" pitchFamily="34" charset="-122"/>
                 <a:cs typeface="Arial" pitchFamily="34" charset="-120"/>
               </a:rPr>
-              <a:t>Schema languages: levels 2 and 3 machine-checkable</a:t>
+              <a:t>Schema languages: </a:t>
+            </a:r>
+            <a:r>
+              <a:rPr lang="en-US" sz="1200" dirty="0">
+                <a:solidFill>
+                  <a:srgbClr val="1F2933"/>
+                </a:solidFill>
+                <a:latin typeface="Arial" pitchFamily="34" charset="0"/>
+                <a:ea typeface="Arial" pitchFamily="34" charset="-122"/>
+                <a:cs typeface="Arial" pitchFamily="34" charset="-120"/>
+              </a:rPr>
+              <a:t>ensure file and dataset organization are machine-checkable</a:t>
             </a:r>
             <a:endParaRPr lang="en-US" sz="1200" dirty="0"/>
           </a:p>
